--- a/paper/oral/EPG-NSGA-II_MIND2026_Oral_Corrected.pptx
+++ b/paper/oral/EPG-NSGA-II_MIND2026_Oral_Corrected.pptx
@@ -1,27 +1,27 @@
 
 <file path=ppt/presentation.xml><?xml version="1.0" encoding="utf-8"?>
-<p:presentation xmlns:a="http://schemas.openxmlformats.org/drawingml/2006/main" xmlns:p="http://schemas.openxmlformats.org/presentationml/2006/main" xmlns:r="http://schemas.openxmlformats.org/officeDocument/2006/relationships" saveSubsetFonts="1" autoCompressPictures="0">
+<p:presentation xmlns:a="http://schemas.openxmlformats.org/drawingml/2006/main" xmlns:r="http://schemas.openxmlformats.org/officeDocument/2006/relationships" xmlns:p="http://schemas.openxmlformats.org/presentationml/2006/main" autoCompressPictures="0">
   <p:sldMasterIdLst>
     <p:sldMasterId id="2147483648" r:id="rId1"/>
   </p:sldMasterIdLst>
   <p:notesMasterIdLst>
-    <p:notesMasterId r:id="rId12"/>
+    <p:notesMasterId r:id="rId4"/>
   </p:notesMasterIdLst>
   <p:sldIdLst>
-    <p:sldId id="256" r:id="rId7"/>
-    <p:sldId id="257" r:id="rId8"/>
-    <p:sldId id="258" r:id="rId9"/>
-    <p:sldId id="259" r:id="rId10"/>
-    <p:sldId id="260" r:id="rId11"/>
+    <p:sldId id="256" r:id="rId3"/>
+    <p:sldId id="257" r:id="rId5"/>
+    <p:sldId id="258" r:id="rId6"/>
+    <p:sldId id="259" r:id="rId7"/>
+    <p:sldId id="260" r:id="rId8"/>
   </p:sldIdLst>
   <p:sldSz cx="12192000" cy="6858000" type="screen16x9"/>
   <p:notesSz cx="6858000" cy="9144000"/>
   <p:defaultTextStyle>
     <a:defPPr>
-      <a:defRPr lang="en"/>
+      <a:defRPr lang="en-GB"/>
     </a:defPPr>
     <a:lvl1pPr marL="0" algn="l" defTabSz="457200" rtl="0" eaLnBrk="1" latinLnBrk="0" hangingPunct="1">
-      <a:defRPr sz="1800" kern="1200" lang="en">
+      <a:defRPr lang="en-GB" sz="1800" kern="1200">
         <a:solidFill>
           <a:schemeClr val="tx1"/>
         </a:solidFill>
@@ -31,7 +31,7 @@
       </a:defRPr>
     </a:lvl1pPr>
     <a:lvl2pPr marL="457200" algn="l" defTabSz="457200" rtl="0" eaLnBrk="1" latinLnBrk="0" hangingPunct="1">
-      <a:defRPr sz="1800" kern="1200" lang="en">
+      <a:defRPr lang="en-GB" sz="1800" kern="1200">
         <a:solidFill>
           <a:schemeClr val="tx1"/>
         </a:solidFill>
@@ -41,7 +41,7 @@
       </a:defRPr>
     </a:lvl2pPr>
     <a:lvl3pPr marL="914400" algn="l" defTabSz="457200" rtl="0" eaLnBrk="1" latinLnBrk="0" hangingPunct="1">
-      <a:defRPr sz="1800" kern="1200" lang="en">
+      <a:defRPr lang="en-GB" sz="1800" kern="1200">
         <a:solidFill>
           <a:schemeClr val="tx1"/>
         </a:solidFill>
@@ -51,7 +51,7 @@
       </a:defRPr>
     </a:lvl3pPr>
     <a:lvl4pPr marL="1371600" algn="l" defTabSz="457200" rtl="0" eaLnBrk="1" latinLnBrk="0" hangingPunct="1">
-      <a:defRPr sz="1800" kern="1200" lang="en">
+      <a:defRPr lang="en-GB" sz="1800" kern="1200">
         <a:solidFill>
           <a:schemeClr val="tx1"/>
         </a:solidFill>
@@ -61,7 +61,7 @@
       </a:defRPr>
     </a:lvl4pPr>
     <a:lvl5pPr marL="1828800" algn="l" defTabSz="457200" rtl="0" eaLnBrk="1" latinLnBrk="0" hangingPunct="1">
-      <a:defRPr sz="1800" kern="1200" lang="en">
+      <a:defRPr lang="en-GB" sz="1800" kern="1200">
         <a:solidFill>
           <a:schemeClr val="tx1"/>
         </a:solidFill>
@@ -71,7 +71,7 @@
       </a:defRPr>
     </a:lvl5pPr>
     <a:lvl6pPr marL="2286000" algn="l" defTabSz="457200" rtl="0" eaLnBrk="1" latinLnBrk="0" hangingPunct="1">
-      <a:defRPr sz="1800" kern="1200" lang="en">
+      <a:defRPr lang="en-GB" sz="1800" kern="1200">
         <a:solidFill>
           <a:schemeClr val="tx1"/>
         </a:solidFill>
@@ -81,7 +81,7 @@
       </a:defRPr>
     </a:lvl6pPr>
     <a:lvl7pPr marL="2743200" algn="l" defTabSz="457200" rtl="0" eaLnBrk="1" latinLnBrk="0" hangingPunct="1">
-      <a:defRPr sz="1800" kern="1200" lang="en">
+      <a:defRPr lang="en-GB" sz="1800" kern="1200">
         <a:solidFill>
           <a:schemeClr val="tx1"/>
         </a:solidFill>
@@ -91,7 +91,7 @@
       </a:defRPr>
     </a:lvl7pPr>
     <a:lvl8pPr marL="3200400" algn="l" defTabSz="457200" rtl="0" eaLnBrk="1" latinLnBrk="0" hangingPunct="1">
-      <a:defRPr sz="1800" kern="1200" lang="en">
+      <a:defRPr lang="en-GB" sz="1800" kern="1200">
         <a:solidFill>
           <a:schemeClr val="tx1"/>
         </a:solidFill>
@@ -101,7 +101,7 @@
       </a:defRPr>
     </a:lvl8pPr>
     <a:lvl9pPr marL="3657600" algn="l" defTabSz="457200" rtl="0" eaLnBrk="1" latinLnBrk="0" hangingPunct="1">
-      <a:defRPr sz="1800" kern="1200" lang="en">
+      <a:defRPr lang="en-GB" sz="1800" kern="1200">
         <a:solidFill>
           <a:schemeClr val="tx1"/>
         </a:solidFill>
@@ -111,12 +111,33 @@
       </a:defRPr>
     </a:lvl9pPr>
   </p:defaultTextStyle>
+  <p:extLst>
+    <p:ext uri="{EFAFB233-063F-42B5-8137-9DF3F51BA10A}">
+      <p15:sldGuideLst xmlns:p15="http://schemas.microsoft.com/office/powerpoint/2012/main">
+        <p15:guide id="1" orient="horz" pos="2160" userDrawn="1">
+          <p15:clr>
+            <a:srgbClr val="A4A3A4"/>
+          </p15:clr>
+        </p15:guide>
+        <p15:guide id="2" pos="2880" userDrawn="1">
+          <p15:clr>
+            <a:srgbClr val="A4A3A4"/>
+          </p15:clr>
+        </p15:guide>
+      </p15:sldGuideLst>
+    </p:ext>
+  </p:extLst>
 </p:presentation>
 </file>
 
 <file path=ppt/notesMasters/notesMaster1.xml><?xml version="1.0" encoding="utf-8"?>
 <p:notesMaster xmlns:a="http://schemas.openxmlformats.org/drawingml/2006/main" xmlns:r="http://schemas.openxmlformats.org/officeDocument/2006/relationships" xmlns:p="http://schemas.openxmlformats.org/presentationml/2006/main">
   <p:cSld>
+    <p:bg>
+      <p:bgRef idx="1001">
+        <a:schemeClr val="bg1"/>
+      </p:bgRef>
+    </p:bg>
     <p:spTree>
       <p:nvGrpSpPr>
         <p:cNvPr id="1" name=""/>
@@ -154,8 +175,7 @@
           <a:bodyPr/>
           <a:lstStyle/>
           <a:p>
-            <a:pPr/>
-            <a:endParaRPr lang="en"/>
+            <a:endParaRPr lang="en-GB"/>
           </a:p>
         </p:txBody>
       </p:sp>
@@ -182,8 +202,7 @@
           <a:bodyPr/>
           <a:lstStyle/>
           <a:p>
-            <a:pPr/>
-            <a:endParaRPr lang="en"/>
+            <a:endParaRPr lang="en-GB"/>
           </a:p>
         </p:txBody>
       </p:sp>
@@ -230,8 +249,7 @@
           <a:bodyPr/>
           <a:lstStyle/>
           <a:p>
-            <a:pPr/>
-            <a:endParaRPr lang="en"/>
+            <a:endParaRPr lang="en-GB"/>
           </a:p>
         </p:txBody>
       </p:sp>
@@ -258,8 +276,7 @@
           <a:bodyPr/>
           <a:lstStyle/>
           <a:p>
-            <a:pPr/>
-            <a:endParaRPr lang="en"/>
+            <a:endParaRPr lang="en-GB"/>
           </a:p>
         </p:txBody>
       </p:sp>
@@ -286,8 +303,7 @@
           <a:bodyPr/>
           <a:lstStyle/>
           <a:p>
-            <a:pPr/>
-            <a:endParaRPr lang="en"/>
+            <a:endParaRPr lang="en-GB"/>
           </a:p>
         </p:txBody>
       </p:sp>
@@ -297,7 +313,7 @@
   <p:hf/>
   <p:notesStyle>
     <a:lvl1pPr marL="0" algn="l">
-      <a:defRPr sz="1200" lang="en"/>
+      <a:defRPr lang="en-GB" sz="1200"/>
     </a:lvl1pPr>
   </p:notesStyle>
 </p:notesMaster>
@@ -347,11 +363,11 @@
           <a:bodyPr/>
           <a:lstStyle/>
           <a:p>
-            <a:pPr/>
             <a:r>
-              <a:rPr lang="en" dirty="0"/>
+              <a:rPr lang="en-GB" dirty="0"/>
               <a:t>Hello everyone. Today I will present Engineering-Prior-Guided NSGA-II, or EPG-NSGA-II, for differentiated capacity-load ratio optimization in county-level 110-kilovolt grids with high distributed photovoltaic penetration. This work jointly plans transformer capacity and storage power. I will briefly explain the planning problem, our algorithm, and the main experimental results.</a:t>
             </a:r>
+            <a:endParaRPr lang="en-GB" dirty="0"/>
           </a:p>
         </p:txBody>
       </p:sp>
@@ -407,44 +423,41 @@
           <a:bodyPr/>
           <a:lstStyle/>
           <a:p>
-            <a:pPr/>
             <a:r>
-              <a:rPr lang="en" dirty="0"/>
+              <a:rPr lang="en-GB" dirty="0"/>
               <a:t>High distributed PV penetration changes power flow. Electricity normally moves from the upstream grid toward local demand, but midday PV generation can create reverse flow through a substation. The planning challenge is that substations differ in PV penetration and transfer capability, while a fixed capacity-load ratio cap of two treats these differences uniformly.</a:t>
             </a:r>
+            <a:endParaRPr lang="en-GB" dirty="0"/>
           </a:p>
           <a:p>
-            <a:pPr/>
-            <a:endParaRPr lang="en" dirty="0"/>
+            <a:endParaRPr lang="en-GB" dirty="0"/>
           </a:p>
           <a:p>
-            <a:pPr/>
             <a:r>
-              <a:rPr lang="en" dirty="0"/>
+              <a:rPr lang="en-GB" dirty="0"/>
               <a:t>We therefore optimize two quantities at each station: its capacity-load ratio, or CLR, and its storage power rating in megawatts. CLR is dimensionless and means planned transformer capacity divided by forecast peak load. The paper uses a five-year forecast with five percent annual growth.</a:t>
             </a:r>
+            <a:endParaRPr lang="en-GB" dirty="0"/>
           </a:p>
           <a:p>
-            <a:pPr/>
-            <a:endParaRPr lang="en" dirty="0"/>
+            <a:endParaRPr lang="en-GB" dirty="0"/>
           </a:p>
           <a:p>
-            <a:pPr/>
             <a:r>
-              <a:rPr lang="en" dirty="0"/>
+              <a:rPr lang="en-GB" dirty="0"/>
               <a:t>The scatter shows all twenty stations in the reported design, with selected CLRs from one point five five to two point six four. Its source-load ratio divides installed PV capacity by current peak load. The dashed line marks the two-point-zero comparison cap.</a:t>
             </a:r>
+            <a:endParaRPr lang="en-GB" dirty="0"/>
           </a:p>
           <a:p>
-            <a:pPr/>
-            <a:endParaRPr lang="en" dirty="0"/>
+            <a:endParaRPr lang="en-GB" dirty="0"/>
           </a:p>
           <a:p>
-            <a:pPr/>
             <a:r>
-              <a:rPr lang="en" dirty="0"/>
+              <a:rPr lang="en-GB" dirty="0"/>
               <a:t>The objectives are annualized cost, in million yuan per year, and expected energy not supplied, or EENS, in megawatt-hours per year. EENS measures supply inadequacy under N-minus-one contingencies. Feasibility is defined by station reverse-flow limits, an aggregate CLR band from one point eight to three, and an upstream reverse-flow limit when enabled.</a:t>
             </a:r>
+            <a:endParaRPr lang="en-GB" dirty="0"/>
           </a:p>
         </p:txBody>
       </p:sp>
@@ -500,44 +513,41 @@
           <a:bodyPr/>
           <a:lstStyle/>
           <a:p>
-            <a:pPr/>
             <a:r>
-              <a:rPr lang="en" dirty="0"/>
+              <a:rPr lang="en-GB" dirty="0"/>
               <a:t>Our solution adds engineering-prior seeding and feasibility repair to standard NSGA-II. The key change is how candidate plans are constructed and adjusted.</a:t>
             </a:r>
+            <a:endParaRPr lang="en-GB" dirty="0"/>
           </a:p>
           <a:p>
-            <a:pPr/>
-            <a:endParaRPr lang="en" dirty="0"/>
+            <a:endParaRPr lang="en-GB" dirty="0"/>
           </a:p>
           <a:p>
-            <a:pPr/>
             <a:r>
-              <a:rPr lang="en" dirty="0"/>
+              <a:rPr lang="en-GB" dirty="0"/>
               <a:t>For the initial population, we sample station CLR values, start storage power at zero, and apply repair before evaluation. During evolution, standard variation produces offspring, the same repair adjusts them, and evaluation and selection form the next generation.</a:t>
             </a:r>
+            <a:endParaRPr lang="en-GB" dirty="0"/>
           </a:p>
           <a:p>
-            <a:pPr/>
-            <a:endParaRPr lang="en" dirty="0"/>
+            <a:endParaRPr lang="en-GB" dirty="0"/>
           </a:p>
           <a:p>
-            <a:pPr/>
             <a:r>
-              <a:rPr lang="en" dirty="0"/>
+              <a:rPr lang="en-GB" dirty="0"/>
               <a:t>Repair has three priorities. First, a bounded common offset shifts station CLR values to satisfy the load-weighted aggregate band. Second, station-level repair increases storage power where residual reverse injection exceeds the transformer reverse-loading limit. Third, when the upstream constraint is enabled, storage is allocated in descending order of residual reverse injection, until the upstream limit is met or adjustable storage ratings reach their bounds.</a:t>
             </a:r>
+            <a:endParaRPr lang="en-GB" dirty="0"/>
           </a:p>
           <a:p>
-            <a:pPr/>
-            <a:endParaRPr lang="en" dirty="0"/>
+            <a:endParaRPr lang="en-GB" dirty="0"/>
           </a:p>
           <a:p>
-            <a:pPr/>
             <a:r>
-              <a:rPr lang="en" dirty="0"/>
+              <a:rPr lang="en-GB" dirty="0"/>
               <a:t>Any remaining infeasibility is handled by constraint domination. Standard variation, non-dominated ranking, and environmental selection are retained. These engineering rules direct candidate construction toward feasibility while the evolutionary search explores the cost and adequacy trade-off.</a:t>
             </a:r>
+            <a:endParaRPr lang="en-GB" dirty="0"/>
           </a:p>
         </p:txBody>
       </p:sp>
@@ -593,44 +603,41 @@
           <a:bodyPr/>
           <a:lstStyle/>
           <a:p>
-            <a:pPr/>
             <a:r>
-              <a:rPr lang="en" dirty="0"/>
+              <a:rPr lang="en-GB" dirty="0"/>
               <a:t>The experiments use a public-data benchmark, with loads scaled from the IEEE thirty-three-bus system and PV profiles derived from PVGIS. Population size is one hundred, and results are averaged over three independent runs.</a:t>
             </a:r>
+            <a:endParaRPr lang="en-GB" dirty="0"/>
           </a:p>
           <a:p>
-            <a:pPr/>
-            <a:endParaRPr lang="en" dirty="0"/>
+            <a:endParaRPr lang="en-GB" dirty="0"/>
           </a:p>
           <a:p>
-            <a:pPr/>
             <a:r>
-              <a:rPr lang="en" dirty="0"/>
+              <a:rPr lang="en-GB" dirty="0"/>
               <a:t>For forty substations, EPG-NSGA-II achieves four point eight percent higher mean final hypervolume than standard NSGA-II. The left panel shows convergence, with shading indicating one standard deviation across the three runs. Hypervolume is normalized to the standard baseline's final mean using a common reference point. The baselines run for eight hundred generations, while EPG-NSGA-II and its ablations run for four hundred. The mean EPG curve reaches the standard baseline's final hypervolume by generation eighty-four. The right panel shows every final run and its method mean. Repair-only nearly matches the full method, while seeding-only remains close to the baseline. Repair is therefore the main contributor to the final gain.</a:t>
             </a:r>
+            <a:endParaRPr lang="en-GB" dirty="0"/>
           </a:p>
           <a:p>
-            <a:pPr/>
-            <a:endParaRPr lang="en" dirty="0"/>
+            <a:endParaRPr lang="en-GB" dirty="0"/>
           </a:p>
           <a:p>
-            <a:pPr/>
             <a:r>
-              <a:rPr lang="en" dirty="0"/>
+              <a:rPr lang="en-GB" dirty="0"/>
               <a:t>The twenty-substation planning comparison is summarized above the plots. Annualized cost falls from two hundred thirty-six point four zero to two hundred twenty-eight point four three million yuan per year, a reduction of three point four percent. Modeled EENS falls from five hundred sixty-one to zero megawatt-hours per year relative to the two-point-zero-capped design.</a:t>
             </a:r>
+            <a:endParaRPr lang="en-GB" dirty="0"/>
           </a:p>
           <a:p>
-            <a:pPr/>
-            <a:endParaRPr lang="en" dirty="0"/>
+            <a:endParaRPr lang="en-GB" dirty="0"/>
           </a:p>
           <a:p>
-            <a:pPr/>
             <a:r>
-              <a:rPr lang="en" dirty="0"/>
+              <a:rPr lang="en-GB" dirty="0"/>
               <a:t>These results apply to the current model. Storage energy and state-of-charge limits, together with real-grid calibration, remain future work.</a:t>
             </a:r>
+            <a:endParaRPr lang="en-GB" dirty="0"/>
           </a:p>
         </p:txBody>
       </p:sp>
@@ -686,11 +693,11 @@
           <a:bodyPr/>
           <a:lstStyle/>
           <a:p>
-            <a:pPr/>
             <a:r>
-              <a:rPr lang="en" dirty="0"/>
+              <a:rPr lang="en-GB" dirty="0"/>
               <a:t>The main takeaway is that engineering-prior seeding and repair support more effective constrained search and differentiated CLR and storage planning. Thank you for your attention. I welcome your questions.</a:t>
             </a:r>
+            <a:endParaRPr lang="en-GB" dirty="0"/>
           </a:p>
         </p:txBody>
       </p:sp>
@@ -702,8 +709,8 @@
 </p:notes>
 </file>
 
-<file path=ppt/slideLayouts/slideLayout7.xml><?xml version="1.0" encoding="utf-8"?>
-<p:sldLayout xmlns:a="http://schemas.openxmlformats.org/drawingml/2006/main" xmlns:p="http://schemas.openxmlformats.org/presentationml/2006/main" type="blank" preserve="1">
+<file path=ppt/slideLayouts/slideLayout1.xml><?xml version="1.0" encoding="utf-8"?>
+<p:sldLayout xmlns:a="http://schemas.openxmlformats.org/drawingml/2006/main" xmlns:r="http://schemas.openxmlformats.org/officeDocument/2006/relationships" xmlns:p="http://schemas.openxmlformats.org/presentationml/2006/main" type="blank" preserve="1">
   <p:cSld name="EPG_NSGA_II_MIND2026_Oral — Blank">
     <p:spTree>
       <p:nvGrpSpPr>
@@ -735,10 +742,9 @@
           <a:lstStyle/>
           <a:p>
             <a:fld id="{5BCAD085-E8A6-8845-BD4E-CB4CCA059FC4}" type="datetimeFigureOut">
-              <a:rPr lang="en" smtClean="0"/>
-              <a:t>1/27/13</a:t>
+              <a:rPr lang="en-GB" smtClean="0"/>
             </a:fld>
-            <a:endParaRPr lang="en"/>
+            <a:endParaRPr lang="en-GB"/>
           </a:p>
         </p:txBody>
       </p:sp>
@@ -757,7 +763,7 @@
           <a:bodyPr/>
           <a:lstStyle/>
           <a:p>
-            <a:endParaRPr lang="en"/>
+            <a:endParaRPr lang="en-GB"/>
           </a:p>
         </p:txBody>
       </p:sp>
@@ -777,10 +783,9 @@
           <a:lstStyle/>
           <a:p>
             <a:fld id="{C1FF6DA9-008F-8B48-92A6-B652298478BF}" type="slidenum">
-              <a:rPr lang="en" smtClean="0"/>
-              <a:t>‹#›</a:t>
+              <a:rPr lang="en-GB" smtClean="0"/>
             </a:fld>
-            <a:endParaRPr lang="en"/>
+            <a:endParaRPr lang="en-GB"/>
           </a:p>
         </p:txBody>
       </p:sp>
@@ -793,8 +798,8 @@
 </file>
 
 <file path=ppt/slideMasters/slideMaster1.xml><?xml version="1.0" encoding="utf-8"?>
-<p:sldMaster xmlns:a="http://schemas.openxmlformats.org/drawingml/2006/main" xmlns:p="http://schemas.openxmlformats.org/presentationml/2006/main" xmlns:r="http://schemas.openxmlformats.org/officeDocument/2006/relationships">
-  <p:cSld name="EPG_NSGA_II_MIND2026_Oral — Master">
+<p:sldMaster xmlns:a="http://schemas.openxmlformats.org/drawingml/2006/main" xmlns:r="http://schemas.openxmlformats.org/officeDocument/2006/relationships" xmlns:p="http://schemas.openxmlformats.org/presentationml/2006/main">
+  <p:cSld>
     <p:bg>
       <p:bgRef idx="1001">
         <a:schemeClr val="bg1"/>
@@ -837,7 +842,7 @@
           <a:bodyPr vert="horz" lIns="91440" tIns="45720" rIns="91440" bIns="45720" rtlCol="0" anchor="ctr"/>
           <a:lstStyle>
             <a:lvl1pPr algn="l">
-              <a:defRPr sz="1200" lang="en">
+              <a:defRPr lang="en-GB" sz="1200">
                 <a:solidFill>
                   <a:schemeClr val="tx1">
                     <a:tint val="75000"/>
@@ -848,10 +853,9 @@
           </a:lstStyle>
           <a:p>
             <a:fld id="{5BCAD085-E8A6-8845-BD4E-CB4CCA059FC4}" type="datetimeFigureOut">
-              <a:rPr lang="en" smtClean="0"/>
-              <a:t>1/27/13</a:t>
+              <a:rPr lang="en-GB" smtClean="0"/>
             </a:fld>
-            <a:endParaRPr lang="en"/>
+            <a:endParaRPr lang="en-GB"/>
           </a:p>
         </p:txBody>
       </p:sp>
@@ -878,7 +882,7 @@
           <a:bodyPr vert="horz" lIns="91440" tIns="45720" rIns="91440" bIns="45720" rtlCol="0" anchor="ctr"/>
           <a:lstStyle>
             <a:lvl1pPr algn="ctr">
-              <a:defRPr sz="1200" lang="en">
+              <a:defRPr lang="en-GB" sz="1200">
                 <a:solidFill>
                   <a:schemeClr val="tx1">
                     <a:tint val="75000"/>
@@ -888,7 +892,7 @@
             </a:lvl1pPr>
           </a:lstStyle>
           <a:p>
-            <a:endParaRPr lang="en"/>
+            <a:endParaRPr lang="en-GB"/>
           </a:p>
         </p:txBody>
       </p:sp>
@@ -915,7 +919,7 @@
           <a:bodyPr vert="horz" lIns="91440" tIns="45720" rIns="91440" bIns="45720" rtlCol="0" anchor="ctr"/>
           <a:lstStyle>
             <a:lvl1pPr algn="r">
-              <a:defRPr sz="1200" lang="en">
+              <a:defRPr lang="en-GB" sz="1200">
                 <a:solidFill>
                   <a:schemeClr val="tx1">
                     <a:tint val="75000"/>
@@ -926,10 +930,9 @@
           </a:lstStyle>
           <a:p>
             <a:fld id="{C1FF6DA9-008F-8B48-92A6-B652298478BF}" type="slidenum">
-              <a:rPr lang="en" smtClean="0"/>
-              <a:t>‹#›</a:t>
+              <a:rPr lang="en-GB" smtClean="0"/>
             </a:fld>
-            <a:endParaRPr lang="en"/>
+            <a:endParaRPr lang="en-GB"/>
           </a:p>
         </p:txBody>
       </p:sp>
@@ -937,7 +940,7 @@
   </p:cSld>
   <p:clrMap bg1="lt1" tx1="dk1" bg2="lt2" tx2="dk2" accent1="accent1" accent2="accent2" accent3="accent3" accent4="accent4" accent5="accent5" accent6="accent6" hlink="hlink" folHlink="folHlink"/>
   <p:sldLayoutIdLst>
-    <p:sldLayoutId id="2147483655" r:id="rId7"/>
+    <p:sldLayoutId id="2147483649" r:id="rId1"/>
   </p:sldLayoutIdLst>
   <p:txStyles>
     <p:titleStyle>
@@ -946,7 +949,7 @@
           <a:spcPct val="0"/>
         </a:spcBef>
         <a:buNone/>
-        <a:defRPr sz="3150" kern="1200" lang="en">
+        <a:defRPr lang="en-GB" sz="3150" kern="1200">
           <a:solidFill>
             <a:schemeClr val="tx1"/>
           </a:solidFill>
@@ -961,9 +964,9 @@
         <a:spcBef>
           <a:spcPct val="20000"/>
         </a:spcBef>
-        <a:buFont typeface="Arial"/>
+        <a:buFont typeface="Arial" panose="020B0604020202020204"/>
         <a:buChar char="•"/>
-        <a:defRPr sz="2100" kern="1200" lang="en">
+        <a:defRPr lang="en-GB" sz="2100" kern="1200">
           <a:solidFill>
             <a:schemeClr val="tx1"/>
           </a:solidFill>
@@ -976,9 +979,9 @@
         <a:spcBef>
           <a:spcPct val="20000"/>
         </a:spcBef>
-        <a:buFont typeface="Arial"/>
+        <a:buFont typeface="Arial" panose="020B0604020202020204"/>
         <a:buChar char="–"/>
-        <a:defRPr sz="1950" kern="1200" lang="en">
+        <a:defRPr lang="en-GB" sz="1950" kern="1200">
           <a:solidFill>
             <a:schemeClr val="tx1"/>
           </a:solidFill>
@@ -991,9 +994,9 @@
         <a:spcBef>
           <a:spcPct val="20000"/>
         </a:spcBef>
-        <a:buFont typeface="Arial"/>
+        <a:buFont typeface="Arial" panose="020B0604020202020204"/>
         <a:buChar char="•"/>
-        <a:defRPr sz="1850" kern="1200" lang="en">
+        <a:defRPr lang="en-GB" sz="1850" kern="1200">
           <a:solidFill>
             <a:schemeClr val="tx1"/>
           </a:solidFill>
@@ -1006,9 +1009,9 @@
         <a:spcBef>
           <a:spcPct val="20000"/>
         </a:spcBef>
-        <a:buFont typeface="Arial"/>
+        <a:buFont typeface="Arial" panose="020B0604020202020204"/>
         <a:buChar char="–"/>
-        <a:defRPr sz="1700" kern="1200" lang="en">
+        <a:defRPr lang="en-GB" sz="1700" kern="1200">
           <a:solidFill>
             <a:schemeClr val="tx1"/>
           </a:solidFill>
@@ -1021,9 +1024,9 @@
         <a:spcBef>
           <a:spcPct val="20000"/>
         </a:spcBef>
-        <a:buFont typeface="Arial"/>
+        <a:buFont typeface="Arial" panose="020B0604020202020204"/>
         <a:buChar char="»"/>
-        <a:defRPr sz="1600" kern="1200" lang="en">
+        <a:defRPr lang="en-GB" sz="1600" kern="1200">
           <a:solidFill>
             <a:schemeClr val="tx1"/>
           </a:solidFill>
@@ -1036,9 +1039,9 @@
         <a:spcBef>
           <a:spcPct val="20000"/>
         </a:spcBef>
-        <a:buFont typeface="Arial"/>
+        <a:buFont typeface="Arial" panose="020B0604020202020204"/>
         <a:buChar char="•"/>
-        <a:defRPr sz="1450" kern="1200" lang="en">
+        <a:defRPr lang="en-GB" sz="1450" kern="1200">
           <a:solidFill>
             <a:schemeClr val="tx1"/>
           </a:solidFill>
@@ -1051,9 +1054,9 @@
         <a:spcBef>
           <a:spcPct val="20000"/>
         </a:spcBef>
-        <a:buFont typeface="Arial"/>
+        <a:buFont typeface="Arial" panose="020B0604020202020204"/>
         <a:buChar char="•"/>
-        <a:defRPr sz="1300" kern="1200" lang="en">
+        <a:defRPr lang="en-GB" sz="1300" kern="1200">
           <a:solidFill>
             <a:schemeClr val="tx1"/>
           </a:solidFill>
@@ -1066,9 +1069,9 @@
         <a:spcBef>
           <a:spcPct val="20000"/>
         </a:spcBef>
-        <a:buFont typeface="Arial"/>
+        <a:buFont typeface="Arial" panose="020B0604020202020204"/>
         <a:buChar char="•"/>
-        <a:defRPr sz="1200" kern="1200" lang="en">
+        <a:defRPr lang="en-GB" sz="1200" kern="1200">
           <a:solidFill>
             <a:schemeClr val="tx1"/>
           </a:solidFill>
@@ -1081,9 +1084,9 @@
         <a:spcBef>
           <a:spcPct val="20000"/>
         </a:spcBef>
-        <a:buFont typeface="Arial"/>
+        <a:buFont typeface="Arial" panose="020B0604020202020204"/>
         <a:buChar char="•"/>
-        <a:defRPr sz="1050" kern="1200" lang="en">
+        <a:defRPr lang="en-GB" sz="1050" kern="1200">
           <a:solidFill>
             <a:schemeClr val="tx1"/>
           </a:solidFill>
@@ -1095,10 +1098,10 @@
     </p:bodyStyle>
     <p:otherStyle>
       <a:defPPr>
-        <a:defRPr lang="en"/>
+        <a:defRPr lang="en-GB"/>
       </a:defPPr>
       <a:lvl1pPr marL="0" algn="l" defTabSz="457200" rtl="0" eaLnBrk="1" latinLnBrk="0" hangingPunct="1">
-        <a:defRPr sz="2100" kern="1200" lang="en">
+        <a:defRPr lang="en-GB" sz="2100" kern="1200">
           <a:solidFill>
             <a:schemeClr val="tx1"/>
           </a:solidFill>
@@ -1108,7 +1111,7 @@
         </a:defRPr>
       </a:lvl1pPr>
       <a:lvl2pPr marL="457200" algn="l" defTabSz="457200" rtl="0" eaLnBrk="1" latinLnBrk="0" hangingPunct="1">
-        <a:defRPr sz="1950" kern="1200" lang="en">
+        <a:defRPr lang="en-GB" sz="1950" kern="1200">
           <a:solidFill>
             <a:schemeClr val="tx1"/>
           </a:solidFill>
@@ -1118,7 +1121,7 @@
         </a:defRPr>
       </a:lvl2pPr>
       <a:lvl3pPr marL="914400" algn="l" defTabSz="457200" rtl="0" eaLnBrk="1" latinLnBrk="0" hangingPunct="1">
-        <a:defRPr sz="1850" kern="1200" lang="en">
+        <a:defRPr lang="en-GB" sz="1850" kern="1200">
           <a:solidFill>
             <a:schemeClr val="tx1"/>
           </a:solidFill>
@@ -1128,7 +1131,7 @@
         </a:defRPr>
       </a:lvl3pPr>
       <a:lvl4pPr marL="1371600" algn="l" defTabSz="457200" rtl="0" eaLnBrk="1" latinLnBrk="0" hangingPunct="1">
-        <a:defRPr sz="1700" kern="1200" lang="en">
+        <a:defRPr lang="en-GB" sz="1700" kern="1200">
           <a:solidFill>
             <a:schemeClr val="tx1"/>
           </a:solidFill>
@@ -1138,7 +1141,7 @@
         </a:defRPr>
       </a:lvl4pPr>
       <a:lvl5pPr marL="1828800" algn="l" defTabSz="457200" rtl="0" eaLnBrk="1" latinLnBrk="0" hangingPunct="1">
-        <a:defRPr sz="1600" kern="1200" lang="en">
+        <a:defRPr lang="en-GB" sz="1600" kern="1200">
           <a:solidFill>
             <a:schemeClr val="tx1"/>
           </a:solidFill>
@@ -1148,7 +1151,7 @@
         </a:defRPr>
       </a:lvl5pPr>
       <a:lvl6pPr marL="2286000" algn="l" defTabSz="457200" rtl="0" eaLnBrk="1" latinLnBrk="0" hangingPunct="1">
-        <a:defRPr sz="1450" kern="1200" lang="en">
+        <a:defRPr lang="en-GB" sz="1450" kern="1200">
           <a:solidFill>
             <a:schemeClr val="tx1"/>
           </a:solidFill>
@@ -1158,7 +1161,7 @@
         </a:defRPr>
       </a:lvl6pPr>
       <a:lvl7pPr marL="2743200" algn="l" defTabSz="457200" rtl="0" eaLnBrk="1" latinLnBrk="0" hangingPunct="1">
-        <a:defRPr sz="1300" kern="1200" lang="en">
+        <a:defRPr lang="en-GB" sz="1300" kern="1200">
           <a:solidFill>
             <a:schemeClr val="tx1"/>
           </a:solidFill>
@@ -1168,7 +1171,7 @@
         </a:defRPr>
       </a:lvl7pPr>
       <a:lvl8pPr marL="3200400" algn="l" defTabSz="457200" rtl="0" eaLnBrk="1" latinLnBrk="0" hangingPunct="1">
-        <a:defRPr sz="1200" kern="1200" lang="en">
+        <a:defRPr lang="en-GB" sz="1200" kern="1200">
           <a:solidFill>
             <a:schemeClr val="tx1"/>
           </a:solidFill>
@@ -1178,7 +1181,7 @@
         </a:defRPr>
       </a:lvl8pPr>
       <a:lvl9pPr marL="3657600" algn="l" defTabSz="457200" rtl="0" eaLnBrk="1" latinLnBrk="0" hangingPunct="1">
-        <a:defRPr sz="1050" kern="1200" lang="en">
+        <a:defRPr lang="en-GB" sz="1050" kern="1200">
           <a:solidFill>
             <a:schemeClr val="tx1"/>
           </a:solidFill>
@@ -1258,7 +1261,7 @@
             <a:p>
               <a:pPr algn="l"/>
               <a:r>
-                <a:rPr lang="en" sz="1500" dirty="0">
+                <a:rPr lang="en-GB" sz="1500" dirty="0">
                   <a:solidFill>
                     <a:srgbClr val="F2F8FC"/>
                   </a:solidFill>
@@ -1268,6 +1271,14 @@
                 </a:rPr>
                 <a:t>MIND 2026</a:t>
               </a:r>
+              <a:endParaRPr lang="en-GB" sz="1500" dirty="0">
+                <a:solidFill>
+                  <a:srgbClr val="F2F8FC"/>
+                </a:solidFill>
+                <a:latin typeface="+mn-lt"/>
+                <a:ea typeface="+mn-ea"/>
+                <a:cs typeface="+mn-cs"/>
+              </a:endParaRPr>
             </a:p>
           </p:txBody>
         </p:sp>
@@ -1298,7 +1309,7 @@
             <a:p>
               <a:pPr algn="r"/>
               <a:r>
-                <a:rPr lang="en" sz="1500" dirty="0">
+                <a:rPr lang="en-GB" sz="1500" dirty="0">
                   <a:solidFill>
                     <a:srgbClr val="66D5D0"/>
                   </a:solidFill>
@@ -1308,6 +1319,14 @@
                 </a:rPr>
                 <a:t>ENGINEERING-PRIOR-GUIDED OPTIMIZATION</a:t>
               </a:r>
+              <a:endParaRPr lang="en-GB" sz="1500" dirty="0">
+                <a:solidFill>
+                  <a:srgbClr val="66D5D0"/>
+                </a:solidFill>
+                <a:latin typeface="+mn-lt"/>
+                <a:ea typeface="+mn-ea"/>
+                <a:cs typeface="+mn-cs"/>
+              </a:endParaRPr>
             </a:p>
           </p:txBody>
         </p:sp>
@@ -1391,7 +1410,7 @@
             <a:p>
               <a:pPr algn="l"/>
               <a:r>
-                <a:rPr lang="en" sz="5700" b="1" dirty="0">
+                <a:rPr lang="en-GB" sz="5700" b="1" dirty="0">
                   <a:solidFill>
                     <a:srgbClr val="F2F8FC"/>
                   </a:solidFill>
@@ -1401,6 +1420,14 @@
                 </a:rPr>
                 <a:t>EPG-NSGA-II</a:t>
               </a:r>
+              <a:endParaRPr lang="en-GB" sz="5700" b="1" dirty="0">
+                <a:solidFill>
+                  <a:srgbClr val="F2F8FC"/>
+                </a:solidFill>
+                <a:latin typeface="+mn-lt"/>
+                <a:ea typeface="+mn-ea"/>
+                <a:cs typeface="+mn-cs"/>
+              </a:endParaRPr>
             </a:p>
           </p:txBody>
         </p:sp>
@@ -1450,7 +1477,7 @@
                 </a:lnSpc>
               </a:pPr>
               <a:r>
-                <a:rPr lang="en" sz="2550" dirty="0">
+                <a:rPr lang="en-GB" sz="2550" dirty="0">
                   <a:solidFill>
                     <a:srgbClr val="F2F8FC"/>
                   </a:solidFill>
@@ -1461,7 +1488,7 @@
                 <a:t>Engineering-Prior-Guided NSGA-II for</a:t>
               </a:r>
               <a:br>
-                <a:rPr lang="en" sz="2550" dirty="0">
+                <a:rPr lang="en-GB" sz="2550" dirty="0">
                   <a:solidFill>
                     <a:srgbClr val="F2F8FC"/>
                   </a:solidFill>
@@ -1471,7 +1498,7 @@
                 </a:rPr>
               </a:br>
               <a:r>
-                <a:rPr lang="en" sz="2550" dirty="0">
+                <a:rPr lang="en-GB" sz="2550" dirty="0">
                   <a:solidFill>
                     <a:srgbClr val="F2F8FC"/>
                   </a:solidFill>
@@ -1482,7 +1509,7 @@
                 <a:t>Differentiated Capacity-Load Ratio</a:t>
               </a:r>
               <a:br>
-                <a:rPr lang="en" sz="2550" dirty="0">
+                <a:rPr lang="en-GB" sz="2550" dirty="0">
                   <a:solidFill>
                     <a:srgbClr val="F2F8FC"/>
                   </a:solidFill>
@@ -1492,7 +1519,7 @@
                 </a:rPr>
               </a:br>
               <a:r>
-                <a:rPr lang="en" sz="2550" dirty="0">
+                <a:rPr lang="en-GB" sz="2550" dirty="0">
                   <a:solidFill>
                     <a:srgbClr val="F2F8FC"/>
                   </a:solidFill>
@@ -1503,7 +1530,7 @@
                 <a:t>Optimization in County-Level 110 kV Grids</a:t>
               </a:r>
               <a:br>
-                <a:rPr lang="en" sz="2550" dirty="0">
+                <a:rPr lang="en-GB" sz="2550" dirty="0">
                   <a:solidFill>
                     <a:srgbClr val="F2F8FC"/>
                   </a:solidFill>
@@ -1513,7 +1540,7 @@
                 </a:rPr>
               </a:br>
               <a:r>
-                <a:rPr lang="en" sz="2550" dirty="0">
+                <a:rPr lang="en-GB" sz="2550" dirty="0">
                   <a:solidFill>
                     <a:srgbClr val="F2F8FC"/>
                   </a:solidFill>
@@ -1523,6 +1550,14 @@
                 </a:rPr>
                 <a:t>with High Distributed PV Penetration</a:t>
               </a:r>
+              <a:endParaRPr lang="en-GB" sz="2550" dirty="0">
+                <a:solidFill>
+                  <a:srgbClr val="F2F8FC"/>
+                </a:solidFill>
+                <a:latin typeface="+mn-lt"/>
+                <a:ea typeface="+mn-ea"/>
+                <a:cs typeface="+mn-cs"/>
+              </a:endParaRPr>
             </a:p>
           </p:txBody>
         </p:sp>
@@ -1568,7 +1603,7 @@
             <a:p>
               <a:pPr algn="l"/>
               <a:r>
-                <a:rPr lang="en" sz="1500" dirty="0">
+                <a:rPr lang="en-GB" sz="1500" dirty="0">
                   <a:solidFill>
                     <a:srgbClr val="F2F8FC"/>
                   </a:solidFill>
@@ -1578,6 +1613,14 @@
                 </a:rPr>
                 <a:t>Dunbin Xu · Ke Wang · Yan Xu* · Ziyue Huang · Fei Geng · Rui Yuan</a:t>
               </a:r>
+              <a:endParaRPr lang="en-GB" sz="1500" dirty="0">
+                <a:solidFill>
+                  <a:srgbClr val="F2F8FC"/>
+                </a:solidFill>
+                <a:latin typeface="+mn-lt"/>
+                <a:ea typeface="+mn-ea"/>
+                <a:cs typeface="+mn-cs"/>
+              </a:endParaRPr>
             </a:p>
           </p:txBody>
         </p:sp>
@@ -1608,7 +1651,7 @@
             <a:p>
               <a:pPr algn="l"/>
               <a:r>
-                <a:rPr lang="en" sz="1200" dirty="0">
+                <a:rPr lang="en-GB" sz="1200" dirty="0">
                   <a:solidFill>
                     <a:srgbClr val="66D5D0"/>
                   </a:solidFill>
@@ -1618,6 +1661,14 @@
                 </a:rPr>
                 <a:t>State Grid Xuzhou Power Supply Company</a:t>
               </a:r>
+              <a:endParaRPr lang="en-GB" sz="1200" dirty="0">
+                <a:solidFill>
+                  <a:srgbClr val="66D5D0"/>
+                </a:solidFill>
+                <a:latin typeface="+mn-lt"/>
+                <a:ea typeface="+mn-ea"/>
+                <a:cs typeface="+mn-cs"/>
+              </a:endParaRPr>
             </a:p>
           </p:txBody>
         </p:sp>
@@ -1652,7 +1703,7 @@
                 </a:lnSpc>
               </a:pPr>
               <a:r>
-                <a:rPr lang="en" sz="1200" dirty="0">
+                <a:rPr lang="en-GB" sz="1200" dirty="0">
                   <a:solidFill>
                     <a:srgbClr val="F2F8FC"/>
                   </a:solidFill>
@@ -1663,7 +1714,7 @@
                 <a:t>State Grid Jiangsu Electric Power Design &amp; Consulting Co., Ltd.</a:t>
               </a:r>
               <a:br>
-                <a:rPr lang="en" sz="1200" dirty="0">
+                <a:rPr lang="en-GB" sz="1200" dirty="0">
                   <a:solidFill>
                     <a:srgbClr val="F2F8FC"/>
                   </a:solidFill>
@@ -1673,7 +1724,7 @@
                 </a:rPr>
               </a:br>
               <a:r>
-                <a:rPr lang="en" sz="1200" dirty="0">
+                <a:rPr lang="en-GB" sz="1200" dirty="0">
                   <a:solidFill>
                     <a:srgbClr val="F2F8FC"/>
                   </a:solidFill>
@@ -1683,6 +1734,14 @@
                 </a:rPr>
                 <a:t>Xuzhou Survey and Design Branch</a:t>
               </a:r>
+              <a:endParaRPr lang="en-GB" sz="1200" dirty="0">
+                <a:solidFill>
+                  <a:srgbClr val="F2F8FC"/>
+                </a:solidFill>
+                <a:latin typeface="+mn-lt"/>
+                <a:ea typeface="+mn-ea"/>
+                <a:cs typeface="+mn-cs"/>
+              </a:endParaRPr>
             </a:p>
           </p:txBody>
         </p:sp>
@@ -2109,7 +2168,7 @@
             <a:p>
               <a:pPr algn="l"/>
               <a:r>
-                <a:rPr lang="en" sz="1200" dirty="0">
+                <a:rPr lang="en-GB" sz="1200" dirty="0">
                   <a:solidFill>
                     <a:srgbClr val="66D5D0"/>
                   </a:solidFill>
@@ -2119,6 +2178,14 @@
                 </a:rPr>
                 <a:t>GRAPHICAL ABSTRACT</a:t>
               </a:r>
+              <a:endParaRPr lang="en-GB" sz="1200" dirty="0">
+                <a:solidFill>
+                  <a:srgbClr val="66D5D0"/>
+                </a:solidFill>
+                <a:latin typeface="+mn-lt"/>
+                <a:ea typeface="+mn-ea"/>
+                <a:cs typeface="+mn-cs"/>
+              </a:endParaRPr>
             </a:p>
           </p:txBody>
         </p:sp>
@@ -2505,7 +2572,7 @@
             <a:p>
               <a:pPr algn="ctr"/>
               <a:r>
-                <a:rPr lang="en" sz="1500" dirty="0">
+                <a:rPr lang="en-GB" sz="1500" dirty="0">
                   <a:solidFill>
                     <a:srgbClr val="F2F8FC"/>
                   </a:solidFill>
@@ -2515,6 +2582,14 @@
                 </a:rPr>
                 <a:t>PV-rich 110 kV substations</a:t>
               </a:r>
+              <a:endParaRPr lang="en-GB" sz="1500" dirty="0">
+                <a:solidFill>
+                  <a:srgbClr val="F2F8FC"/>
+                </a:solidFill>
+                <a:latin typeface="+mn-lt"/>
+                <a:ea typeface="+mn-ea"/>
+                <a:cs typeface="+mn-cs"/>
+              </a:endParaRPr>
             </a:p>
           </p:txBody>
         </p:sp>
@@ -2590,7 +2665,7 @@
             <a:p>
               <a:pPr algn="ctr"/>
               <a:r>
-                <a:rPr lang="en" sz="1650" b="1" dirty="0">
+                <a:rPr lang="en-GB" sz="1650" b="1" dirty="0">
                   <a:solidFill>
                     <a:srgbClr val="66D5D0"/>
                   </a:solidFill>
@@ -2600,6 +2675,14 @@
                 </a:rPr>
                 <a:t>Seeding + feasibility repair</a:t>
               </a:r>
+              <a:endParaRPr lang="en-GB" sz="1650" b="1" dirty="0">
+                <a:solidFill>
+                  <a:srgbClr val="66D5D0"/>
+                </a:solidFill>
+                <a:latin typeface="+mn-lt"/>
+                <a:ea typeface="+mn-ea"/>
+                <a:cs typeface="+mn-cs"/>
+              </a:endParaRPr>
             </a:p>
           </p:txBody>
         </p:sp>
@@ -2630,7 +2713,7 @@
             <a:p>
               <a:pPr algn="ctr"/>
               <a:r>
-                <a:rPr lang="en" sz="1350" dirty="0">
+                <a:rPr lang="en-GB" sz="1350" dirty="0">
                   <a:solidFill>
                     <a:srgbClr val="F2F8FC"/>
                   </a:solidFill>
@@ -2640,6 +2723,14 @@
                 </a:rPr>
                 <a:t>Engineering priors enter the search</a:t>
               </a:r>
+              <a:endParaRPr lang="en-GB" sz="1350" dirty="0">
+                <a:solidFill>
+                  <a:srgbClr val="F2F8FC"/>
+                </a:solidFill>
+                <a:latin typeface="+mn-lt"/>
+                <a:ea typeface="+mn-ea"/>
+                <a:cs typeface="+mn-cs"/>
+              </a:endParaRPr>
             </a:p>
           </p:txBody>
         </p:sp>
@@ -2788,7 +2879,7 @@
               <a:p>
                 <a:pPr algn="ctr"/>
                 <a:r>
-                  <a:rPr lang="en" sz="1350" dirty="0">
+                  <a:rPr lang="en-GB" sz="1350" dirty="0">
                     <a:solidFill>
                       <a:srgbClr val="F2F8FC"/>
                     </a:solidFill>
@@ -2799,7 +2890,7 @@
                   <a:t>R</a:t>
                 </a:r>
                 <a:r>
-                  <a:rPr lang="en" sz="1050" baseline="-25000" dirty="0">
+                  <a:rPr lang="en-GB" sz="1050" baseline="-25000" dirty="0">
                     <a:solidFill>
                       <a:srgbClr val="F2F8FC"/>
                     </a:solidFill>
@@ -2809,6 +2900,14 @@
                   </a:rPr>
                   <a:t>1</a:t>
                 </a:r>
+                <a:endParaRPr lang="en-GB" sz="1050" baseline="-25000" dirty="0">
+                  <a:solidFill>
+                    <a:srgbClr val="F2F8FC"/>
+                  </a:solidFill>
+                  <a:latin typeface="+mn-lt"/>
+                  <a:ea typeface="+mn-ea"/>
+                  <a:cs typeface="+mn-cs"/>
+                </a:endParaRPr>
               </a:p>
             </p:txBody>
           </p:sp>
@@ -2839,7 +2938,7 @@
               <a:p>
                 <a:pPr algn="ctr"/>
                 <a:r>
-                  <a:rPr lang="en" sz="1350" dirty="0">
+                  <a:rPr lang="en-GB" sz="1350" dirty="0">
                     <a:solidFill>
                       <a:srgbClr val="F2F8FC"/>
                     </a:solidFill>
@@ -2850,7 +2949,7 @@
                   <a:t>P</a:t>
                 </a:r>
                 <a:r>
-                  <a:rPr lang="en" sz="1050" baseline="-25000" dirty="0">
+                  <a:rPr lang="en-GB" sz="1050" baseline="-25000" dirty="0">
                     <a:solidFill>
                       <a:srgbClr val="F2F8FC"/>
                     </a:solidFill>
@@ -2860,6 +2959,14 @@
                   </a:rPr>
                   <a:t>1</a:t>
                 </a:r>
+                <a:endParaRPr lang="en-GB" sz="1050" baseline="-25000" dirty="0">
+                  <a:solidFill>
+                    <a:srgbClr val="F2F8FC"/>
+                  </a:solidFill>
+                  <a:latin typeface="+mn-lt"/>
+                  <a:ea typeface="+mn-ea"/>
+                  <a:cs typeface="+mn-cs"/>
+                </a:endParaRPr>
               </a:p>
             </p:txBody>
           </p:sp>
@@ -2890,7 +2997,7 @@
               <a:p>
                 <a:pPr algn="ctr"/>
                 <a:r>
-                  <a:rPr lang="en" sz="1350" dirty="0">
+                  <a:rPr lang="en-GB" sz="1350" dirty="0">
                     <a:solidFill>
                       <a:srgbClr val="F2F8FC"/>
                     </a:solidFill>
@@ -2901,7 +3008,7 @@
                   <a:t>R</a:t>
                 </a:r>
                 <a:r>
-                  <a:rPr lang="en" sz="1050" baseline="-25000" dirty="0">
+                  <a:rPr lang="en-GB" sz="1050" baseline="-25000" dirty="0">
                     <a:solidFill>
                       <a:srgbClr val="F2F8FC"/>
                     </a:solidFill>
@@ -2911,6 +3018,14 @@
                   </a:rPr>
                   <a:t>2</a:t>
                 </a:r>
+                <a:endParaRPr lang="en-GB" sz="1050" baseline="-25000" dirty="0">
+                  <a:solidFill>
+                    <a:srgbClr val="F2F8FC"/>
+                  </a:solidFill>
+                  <a:latin typeface="+mn-lt"/>
+                  <a:ea typeface="+mn-ea"/>
+                  <a:cs typeface="+mn-cs"/>
+                </a:endParaRPr>
               </a:p>
             </p:txBody>
           </p:sp>
@@ -2941,7 +3056,7 @@
               <a:p>
                 <a:pPr algn="ctr"/>
                 <a:r>
-                  <a:rPr lang="en" sz="1350" dirty="0">
+                  <a:rPr lang="en-GB" sz="1350" dirty="0">
                     <a:solidFill>
                       <a:srgbClr val="F2F8FC"/>
                     </a:solidFill>
@@ -2952,7 +3067,7 @@
                   <a:t>P</a:t>
                 </a:r>
                 <a:r>
-                  <a:rPr lang="en" sz="1050" baseline="-25000" dirty="0">
+                  <a:rPr lang="en-GB" sz="1050" baseline="-25000" dirty="0">
                     <a:solidFill>
                       <a:srgbClr val="F2F8FC"/>
                     </a:solidFill>
@@ -2962,6 +3077,14 @@
                   </a:rPr>
                   <a:t>2</a:t>
                 </a:r>
+                <a:endParaRPr lang="en-GB" sz="1050" baseline="-25000" dirty="0">
+                  <a:solidFill>
+                    <a:srgbClr val="F2F8FC"/>
+                  </a:solidFill>
+                  <a:latin typeface="+mn-lt"/>
+                  <a:ea typeface="+mn-ea"/>
+                  <a:cs typeface="+mn-cs"/>
+                </a:endParaRPr>
               </a:p>
             </p:txBody>
           </p:sp>
@@ -2992,7 +3115,7 @@
               <a:p>
                 <a:pPr algn="ctr"/>
                 <a:r>
-                  <a:rPr lang="en" sz="1350" dirty="0">
+                  <a:rPr lang="en-GB" sz="1350" dirty="0">
                     <a:solidFill>
                       <a:srgbClr val="F2F8FC"/>
                     </a:solidFill>
@@ -3003,7 +3126,7 @@
                   <a:t>R</a:t>
                 </a:r>
                 <a:r>
-                  <a:rPr lang="en" sz="1050" baseline="-25000" dirty="0">
+                  <a:rPr lang="en-GB" sz="1050" baseline="-25000" dirty="0">
                     <a:solidFill>
                       <a:srgbClr val="F2F8FC"/>
                     </a:solidFill>
@@ -3013,6 +3136,14 @@
                   </a:rPr>
                   <a:t>j</a:t>
                 </a:r>
+                <a:endParaRPr lang="en-GB" sz="1050" baseline="-25000" dirty="0">
+                  <a:solidFill>
+                    <a:srgbClr val="F2F8FC"/>
+                  </a:solidFill>
+                  <a:latin typeface="+mn-lt"/>
+                  <a:ea typeface="+mn-ea"/>
+                  <a:cs typeface="+mn-cs"/>
+                </a:endParaRPr>
               </a:p>
             </p:txBody>
           </p:sp>
@@ -3043,7 +3174,7 @@
               <a:p>
                 <a:pPr algn="ctr"/>
                 <a:r>
-                  <a:rPr lang="en" sz="1350" dirty="0">
+                  <a:rPr lang="en-GB" sz="1350" dirty="0">
                     <a:solidFill>
                       <a:srgbClr val="F2F8FC"/>
                     </a:solidFill>
@@ -3054,7 +3185,7 @@
                   <a:t>P</a:t>
                 </a:r>
                 <a:r>
-                  <a:rPr lang="en" sz="1050" baseline="-25000" dirty="0">
+                  <a:rPr lang="en-GB" sz="1050" baseline="-25000" dirty="0">
                     <a:solidFill>
                       <a:srgbClr val="F2F8FC"/>
                     </a:solidFill>
@@ -3064,6 +3195,14 @@
                   </a:rPr>
                   <a:t>j</a:t>
                 </a:r>
+                <a:endParaRPr lang="en-GB" sz="1050" baseline="-25000" dirty="0">
+                  <a:solidFill>
+                    <a:srgbClr val="F2F8FC"/>
+                  </a:solidFill>
+                  <a:latin typeface="+mn-lt"/>
+                  <a:ea typeface="+mn-ea"/>
+                  <a:cs typeface="+mn-cs"/>
+                </a:endParaRPr>
               </a:p>
             </p:txBody>
           </p:sp>
@@ -3095,7 +3234,7 @@
             <a:p>
               <a:pPr algn="ctr"/>
               <a:r>
-                <a:rPr lang="en" sz="1500" dirty="0">
+                <a:rPr lang="en-GB" sz="1500" dirty="0">
                   <a:solidFill>
                     <a:srgbClr val="F2F8FC"/>
                   </a:solidFill>
@@ -3105,6 +3244,14 @@
                 </a:rPr>
                 <a:t>Differentiated CLR + storage</a:t>
               </a:r>
+              <a:endParaRPr lang="en-GB" sz="1500" dirty="0">
+                <a:solidFill>
+                  <a:srgbClr val="F2F8FC"/>
+                </a:solidFill>
+                <a:latin typeface="+mn-lt"/>
+                <a:ea typeface="+mn-ea"/>
+                <a:cs typeface="+mn-cs"/>
+              </a:endParaRPr>
             </a:p>
           </p:txBody>
         </p:sp>
@@ -3150,7 +3297,7 @@
             <a:p>
               <a:pPr algn="l"/>
               <a:r>
-                <a:rPr lang="en" sz="1050" dirty="0">
+                <a:rPr lang="en-GB" sz="1050" dirty="0">
                   <a:solidFill>
                     <a:srgbClr val="F2F8FC"/>
                   </a:solidFill>
@@ -3160,6 +3307,14 @@
                 </a:rPr>
                 <a:t>* Corresponding author: Yan Xu</a:t>
               </a:r>
+              <a:endParaRPr lang="en-GB" sz="1050" dirty="0">
+                <a:solidFill>
+                  <a:srgbClr val="F2F8FC"/>
+                </a:solidFill>
+                <a:latin typeface="+mn-lt"/>
+                <a:ea typeface="+mn-ea"/>
+                <a:cs typeface="+mn-cs"/>
+              </a:endParaRPr>
             </a:p>
           </p:txBody>
         </p:sp>
@@ -3190,7 +3345,7 @@
             <a:p>
               <a:pPr algn="r"/>
               <a:r>
-                <a:rPr lang="en" sz="1050" dirty="0">
+                <a:rPr lang="en-GB" sz="1050" dirty="0">
                   <a:solidFill>
                     <a:srgbClr val="F2F8FC"/>
                   </a:solidFill>
@@ -3200,6 +3355,14 @@
                 </a:rPr>
                 <a:t>01 / 05</a:t>
               </a:r>
+              <a:endParaRPr lang="en-GB" sz="1050" dirty="0">
+                <a:solidFill>
+                  <a:srgbClr val="F2F8FC"/>
+                </a:solidFill>
+                <a:latin typeface="+mn-lt"/>
+                <a:ea typeface="+mn-ea"/>
+                <a:cs typeface="+mn-cs"/>
+              </a:endParaRPr>
             </a:p>
           </p:txBody>
         </p:sp>
@@ -3209,9 +3372,18 @@
   <p:clrMapOvr>
     <a:masterClrMapping/>
   </p:clrMapOvr>
-  <p:transition xmlns:p14="http://schemas.microsoft.com/office/powerpoint/2010/main" p14:dur="400">
-    <p:fade/>
-  </p:transition>
+  <mc:AlternateContent xmlns:mc="http://schemas.openxmlformats.org/markup-compatibility/2006">
+    <mc:Choice xmlns:p14="http://schemas.microsoft.com/office/powerpoint/2010/main" Requires="p14">
+      <p:transition p14:dur="400">
+        <p:fade/>
+      </p:transition>
+    </mc:Choice>
+    <mc:Fallback>
+      <p:transition>
+        <p:fade/>
+      </p:transition>
+    </mc:Fallback>
+  </mc:AlternateContent>
 </p:sld>
 </file>
 
@@ -3281,7 +3453,7 @@
             <a:p>
               <a:pPr algn="l"/>
               <a:r>
-                <a:rPr lang="en" sz="1350" b="1" dirty="0">
+                <a:rPr lang="en-GB" sz="1350" b="1" dirty="0">
                   <a:solidFill>
                     <a:schemeClr val="accent2"/>
                   </a:solidFill>
@@ -3291,6 +3463,14 @@
                 </a:rPr>
                 <a:t>01 / BACKGROUND &amp; PROBLEM</a:t>
               </a:r>
+              <a:endParaRPr lang="en-GB" sz="1350" b="1" dirty="0">
+                <a:solidFill>
+                  <a:schemeClr val="accent2"/>
+                </a:solidFill>
+                <a:latin typeface="+mn-lt"/>
+                <a:ea typeface="+mn-ea"/>
+                <a:cs typeface="+mn-cs"/>
+              </a:endParaRPr>
             </a:p>
           </p:txBody>
         </p:sp>
@@ -3321,7 +3501,7 @@
             <a:p>
               <a:pPr algn="l"/>
               <a:r>
-                <a:rPr lang="en" sz="3150" b="1" dirty="0">
+                <a:rPr lang="en-GB" sz="3150" b="1" dirty="0">
                   <a:solidFill>
                     <a:schemeClr val="accent1"/>
                   </a:solidFill>
@@ -3331,6 +3511,14 @@
                 </a:rPr>
                 <a:t>High PV calls for differentiated planning</a:t>
               </a:r>
+              <a:endParaRPr lang="en-GB" sz="3150" b="1" dirty="0">
+                <a:solidFill>
+                  <a:schemeClr val="accent1"/>
+                </a:solidFill>
+                <a:latin typeface="+mn-lt"/>
+                <a:ea typeface="+mn-ea"/>
+                <a:cs typeface="+mn-cs"/>
+              </a:endParaRPr>
             </a:p>
           </p:txBody>
         </p:sp>
@@ -3376,7 +3564,7 @@
             <a:p>
               <a:pPr algn="l"/>
               <a:r>
-                <a:rPr lang="en" sz="1800" b="1" dirty="0">
+                <a:rPr lang="en-GB" sz="1800" b="1" dirty="0">
                   <a:solidFill>
                     <a:schemeClr val="accent1"/>
                   </a:solidFill>
@@ -3387,7 +3575,7 @@
                 <a:t>a</a:t>
               </a:r>
               <a:r>
-                <a:rPr lang="en" sz="1800" dirty="0">
+                <a:rPr lang="en-GB" sz="1800" dirty="0">
                   <a:solidFill>
                     <a:schemeClr val="accent1"/>
                   </a:solidFill>
@@ -3395,8 +3583,16 @@
                   <a:ea typeface="+mn-ea"/>
                   <a:cs typeface="+mn-cs"/>
                 </a:rPr>
-                <a:t xml:space="preserve"> Reverse-flow coupling and planning model</a:t>
+                <a:t> Reverse-flow coupling and planning model</a:t>
               </a:r>
+              <a:endParaRPr lang="en-GB" sz="1800" dirty="0">
+                <a:solidFill>
+                  <a:schemeClr val="accent1"/>
+                </a:solidFill>
+                <a:latin typeface="+mn-lt"/>
+                <a:ea typeface="+mn-ea"/>
+                <a:cs typeface="+mn-cs"/>
+              </a:endParaRPr>
             </a:p>
           </p:txBody>
         </p:sp>
@@ -3442,7 +3638,7 @@
             <a:p>
               <a:pPr algn="l"/>
               <a:r>
-                <a:rPr lang="en" sz="1800" b="1" dirty="0">
+                <a:rPr lang="en-GB" sz="1800" b="1" dirty="0">
                   <a:solidFill>
                     <a:schemeClr val="accent1"/>
                   </a:solidFill>
@@ -3453,7 +3649,7 @@
                 <a:t>b</a:t>
               </a:r>
               <a:r>
-                <a:rPr lang="en" sz="1800" dirty="0">
+                <a:rPr lang="en-GB" sz="1800" dirty="0">
                   <a:solidFill>
                     <a:schemeClr val="accent1"/>
                   </a:solidFill>
@@ -3461,8 +3657,16 @@
                   <a:ea typeface="+mn-ea"/>
                   <a:cs typeface="+mn-cs"/>
                 </a:rPr>
-                <a:t xml:space="preserve"> Station heterogeneity | K = 20</a:t>
+                <a:t> Station heterogeneity | K = 20</a:t>
               </a:r>
+              <a:endParaRPr lang="en-GB" sz="1800" dirty="0">
+                <a:solidFill>
+                  <a:schemeClr val="accent1"/>
+                </a:solidFill>
+                <a:latin typeface="+mn-lt"/>
+                <a:ea typeface="+mn-ea"/>
+                <a:cs typeface="+mn-cs"/>
+              </a:endParaRPr>
             </a:p>
           </p:txBody>
         </p:sp>
@@ -3851,7 +4055,7 @@
             <a:p>
               <a:pPr algn="ctr"/>
               <a:r>
-                <a:rPr lang="en" sz="1500" dirty="0">
+                <a:rPr lang="en-GB" sz="1500" dirty="0">
                   <a:solidFill>
                     <a:schemeClr val="accent1"/>
                   </a:solidFill>
@@ -3861,6 +4065,14 @@
                 </a:rPr>
                 <a:t>Upstream grid</a:t>
               </a:r>
+              <a:endParaRPr lang="en-GB" sz="1500" dirty="0">
+                <a:solidFill>
+                  <a:schemeClr val="accent1"/>
+                </a:solidFill>
+                <a:latin typeface="+mn-lt"/>
+                <a:ea typeface="+mn-ea"/>
+                <a:cs typeface="+mn-cs"/>
+              </a:endParaRPr>
             </a:p>
           </p:txBody>
         </p:sp>
@@ -3895,7 +4107,7 @@
                 </a:lnSpc>
               </a:pPr>
               <a:r>
-                <a:rPr lang="en" sz="1500" b="1" dirty="0">
+                <a:rPr lang="en-GB" sz="1500" b="1" dirty="0">
                   <a:solidFill>
                     <a:schemeClr val="accent2"/>
                   </a:solidFill>
@@ -3906,7 +4118,7 @@
                 <a:t>Midday PV export</a:t>
               </a:r>
               <a:br>
-                <a:rPr lang="en" sz="1500" b="1" dirty="0">
+                <a:rPr lang="en-GB" sz="1500" b="1" dirty="0">
                   <a:solidFill>
                     <a:schemeClr val="accent2"/>
                   </a:solidFill>
@@ -3916,7 +4128,7 @@
                 </a:rPr>
               </a:br>
               <a:r>
-                <a:rPr lang="en" sz="1500" b="1" dirty="0">
+                <a:rPr lang="en-GB" sz="1500" b="1" dirty="0">
                   <a:solidFill>
                     <a:schemeClr val="accent2"/>
                   </a:solidFill>
@@ -3926,6 +4138,14 @@
                 </a:rPr>
                 <a:t>Reverse flow</a:t>
               </a:r>
+              <a:endParaRPr lang="en-GB" sz="1500" b="1" dirty="0">
+                <a:solidFill>
+                  <a:schemeClr val="accent2"/>
+                </a:solidFill>
+                <a:latin typeface="+mn-lt"/>
+                <a:ea typeface="+mn-ea"/>
+                <a:cs typeface="+mn-cs"/>
+              </a:endParaRPr>
             </a:p>
           </p:txBody>
         </p:sp>
@@ -3956,7 +4176,7 @@
             <a:p>
               <a:pPr algn="ctr"/>
               <a:r>
-                <a:rPr lang="en" sz="1500" dirty="0">
+                <a:rPr lang="en-GB" sz="1500" dirty="0">
                   <a:solidFill>
                     <a:schemeClr val="accent2"/>
                   </a:solidFill>
@@ -3966,6 +4186,14 @@
                 </a:rPr>
                 <a:t>Distributed PV</a:t>
               </a:r>
+              <a:endParaRPr lang="en-GB" sz="1500" dirty="0">
+                <a:solidFill>
+                  <a:schemeClr val="accent2"/>
+                </a:solidFill>
+                <a:latin typeface="+mn-lt"/>
+                <a:ea typeface="+mn-ea"/>
+                <a:cs typeface="+mn-cs"/>
+              </a:endParaRPr>
             </a:p>
           </p:txBody>
         </p:sp>
@@ -3996,7 +4224,7 @@
             <a:p>
               <a:pPr algn="ctr"/>
               <a:r>
-                <a:rPr lang="en" sz="1500" dirty="0">
+                <a:rPr lang="en-GB" sz="1500" dirty="0">
                   <a:solidFill>
                     <a:schemeClr val="accent3"/>
                   </a:solidFill>
@@ -4006,6 +4234,14 @@
                 </a:rPr>
                 <a:t>Local load</a:t>
               </a:r>
+              <a:endParaRPr lang="en-GB" sz="1500" dirty="0">
+                <a:solidFill>
+                  <a:schemeClr val="accent3"/>
+                </a:solidFill>
+                <a:latin typeface="+mn-lt"/>
+                <a:ea typeface="+mn-ea"/>
+                <a:cs typeface="+mn-cs"/>
+              </a:endParaRPr>
             </a:p>
           </p:txBody>
         </p:sp>
@@ -4040,7 +4276,7 @@
                 </a:lnSpc>
               </a:pPr>
               <a:r>
-                <a:rPr lang="en" sz="1350" dirty="0">
+                <a:rPr lang="en-GB" sz="1350" dirty="0">
                   <a:solidFill>
                     <a:schemeClr val="accent5"/>
                   </a:solidFill>
@@ -4051,7 +4287,7 @@
                 <a:t>110 kV</a:t>
               </a:r>
               <a:br>
-                <a:rPr lang="en" sz="1350" dirty="0">
+                <a:rPr lang="en-GB" sz="1350" dirty="0">
                   <a:solidFill>
                     <a:schemeClr val="accent5"/>
                   </a:solidFill>
@@ -4061,7 +4297,7 @@
                 </a:rPr>
               </a:br>
               <a:r>
-                <a:rPr lang="en" sz="1350" dirty="0">
+                <a:rPr lang="en-GB" sz="1350" dirty="0">
                   <a:solidFill>
                     <a:schemeClr val="accent5"/>
                   </a:solidFill>
@@ -4071,6 +4307,14 @@
                 </a:rPr>
                 <a:t>substation</a:t>
               </a:r>
+              <a:endParaRPr lang="en-GB" sz="1350" dirty="0">
+                <a:solidFill>
+                  <a:schemeClr val="accent5"/>
+                </a:solidFill>
+                <a:latin typeface="+mn-lt"/>
+                <a:ea typeface="+mn-ea"/>
+                <a:cs typeface="+mn-cs"/>
+              </a:endParaRPr>
             </a:p>
           </p:txBody>
         </p:sp>
@@ -4101,7 +4345,7 @@
             <a:p>
               <a:pPr algn="l"/>
               <a:r>
-                <a:rPr lang="en" sz="1650" dirty="0">
+                <a:rPr lang="en-GB" sz="1650" dirty="0">
                   <a:solidFill>
                     <a:schemeClr val="dk1"/>
                   </a:solidFill>
@@ -4109,10 +4353,10 @@
                   <a:ea typeface="+mn-ea"/>
                   <a:cs typeface="+mn-cs"/>
                 </a:rPr>
-                <a:t xml:space="preserve">Decisions: </a:t>
+                <a:t>Decisions: </a:t>
               </a:r>
               <a:r>
-                <a:rPr lang="en" sz="1650" b="1" dirty="0">
+                <a:rPr lang="en-GB" sz="1650" b="1" dirty="0">
                   <a:solidFill>
                     <a:schemeClr val="accent1"/>
                   </a:solidFill>
@@ -4123,7 +4367,7 @@
                 <a:t>CLR R</a:t>
               </a:r>
               <a:r>
-                <a:rPr lang="en" sz="1200" b="1" baseline="-25000" dirty="0">
+                <a:rPr lang="en-GB" sz="1200" b="1" baseline="-25000" dirty="0">
                   <a:solidFill>
                     <a:schemeClr val="accent1"/>
                   </a:solidFill>
@@ -4134,7 +4378,7 @@
                 <a:t>j</a:t>
               </a:r>
               <a:r>
-                <a:rPr lang="en" sz="1650" dirty="0">
+                <a:rPr lang="en-GB" sz="1650" dirty="0">
                   <a:solidFill>
                     <a:schemeClr val="dk1"/>
                   </a:solidFill>
@@ -4142,10 +4386,10 @@
                   <a:ea typeface="+mn-ea"/>
                   <a:cs typeface="+mn-cs"/>
                 </a:rPr>
-                <a:t xml:space="preserve"> and </a:t>
+                <a:t> and </a:t>
               </a:r>
               <a:r>
-                <a:rPr lang="en" sz="1650" b="1" dirty="0">
+                <a:rPr lang="en-GB" sz="1650" b="1" dirty="0">
                   <a:solidFill>
                     <a:schemeClr val="accent1"/>
                   </a:solidFill>
@@ -4156,7 +4400,7 @@
                 <a:t>storage power P</a:t>
               </a:r>
               <a:r>
-                <a:rPr lang="en" sz="1200" b="1" baseline="-25000" dirty="0">
+                <a:rPr lang="en-GB" sz="1200" b="1" baseline="-25000" dirty="0">
                   <a:solidFill>
                     <a:schemeClr val="accent1"/>
                   </a:solidFill>
@@ -4167,7 +4411,7 @@
                 <a:t>j</a:t>
               </a:r>
               <a:r>
-                <a:rPr lang="en" sz="1650" b="1" dirty="0">
+                <a:rPr lang="en-GB" sz="1650" b="1" dirty="0">
                   <a:solidFill>
                     <a:schemeClr val="accent1"/>
                   </a:solidFill>
@@ -4175,8 +4419,16 @@
                   <a:ea typeface="+mn-ea"/>
                   <a:cs typeface="+mn-cs"/>
                 </a:rPr>
-                <a:t xml:space="preserve"> (MW)</a:t>
+                <a:t> (MW)</a:t>
               </a:r>
+              <a:endParaRPr lang="en-GB" sz="1650" b="1" dirty="0">
+                <a:solidFill>
+                  <a:schemeClr val="accent1"/>
+                </a:solidFill>
+                <a:latin typeface="+mn-lt"/>
+                <a:ea typeface="+mn-ea"/>
+                <a:cs typeface="+mn-cs"/>
+              </a:endParaRPr>
             </a:p>
           </p:txBody>
         </p:sp>
@@ -4207,7 +4459,7 @@
             <a:p>
               <a:pPr algn="l"/>
               <a:r>
-                <a:rPr lang="en" sz="1350" dirty="0">
+                <a:rPr lang="en-GB" sz="1350" dirty="0">
                   <a:solidFill>
                     <a:schemeClr val="accent5"/>
                   </a:solidFill>
@@ -4217,6 +4469,14 @@
                 </a:rPr>
                 <a:t>CLR = transformer capacity / forecast peak load</a:t>
               </a:r>
+              <a:endParaRPr lang="en-GB" sz="1350" dirty="0">
+                <a:solidFill>
+                  <a:schemeClr val="accent5"/>
+                </a:solidFill>
+                <a:latin typeface="+mn-lt"/>
+                <a:ea typeface="+mn-ea"/>
+                <a:cs typeface="+mn-cs"/>
+              </a:endParaRPr>
             </a:p>
           </p:txBody>
         </p:sp>
@@ -4244,20 +4504,20 @@
                 </a:ln>
               </p:spPr>
               <p:txBody>
-                <a:bodyPr lIns="0" tIns="0" rIns="0" bIns="0" wrap="none" anchor="ctr">
+                <a:bodyPr wrap="none" lIns="0" tIns="0" rIns="0" bIns="0" anchor="ctr">
                   <a:normAutofit/>
                 </a:bodyPr>
                 <a:lstStyle/>
                 <a:p>
                   <a:pPr algn="l"/>
                   <a14:m>
-                    <m:oMathPara xmlns:a="http://schemas.openxmlformats.org/drawingml/2006/main" xmlns:m="http://schemas.openxmlformats.org/officeDocument/2006/math">
+                    <m:oMathPara xmlns:m="http://schemas.openxmlformats.org/officeDocument/2006/math">
                       <m:oMathParaPr>
                         <m:jc m:val="left"/>
                       </m:oMathParaPr>
-                      <m:oMath>
+                      <m:oMath xmlns:m="http://schemas.openxmlformats.org/officeDocument/2006/math">
                         <m:r>
-                          <a:rPr lang="en" sz="2100" dirty="0">
+                          <a:rPr lang="en-GB" sz="2100" dirty="0">
                             <a:solidFill>
                               <a:srgbClr val="102B46"/>
                             </a:solidFill>
@@ -4265,13 +4525,32 @@
                             <a:ea typeface="Cambria Math"/>
                             <a:cs typeface="Cambria Math"/>
                           </a:rPr>
-                          <m:t>1.8</m:t>
+                          <m:t>1</m:t>
                         </m:r>
                         <m:r>
-                          <m:rPr>
-                            <m:sty m:val="p"/>
-                          </m:rPr>
-                          <a:rPr lang="en" sz="2100" dirty="0">
+                          <a:rPr lang="en-GB" sz="2100" dirty="0">
+                            <a:solidFill>
+                              <a:srgbClr val="102B46"/>
+                            </a:solidFill>
+                            <a:latin typeface="Cambria Math"/>
+                            <a:ea typeface="Cambria Math"/>
+                            <a:cs typeface="Cambria Math"/>
+                          </a:rPr>
+                          <m:t>.</m:t>
+                        </m:r>
+                        <m:r>
+                          <a:rPr lang="en-GB" sz="2100" dirty="0">
+                            <a:solidFill>
+                              <a:srgbClr val="102B46"/>
+                            </a:solidFill>
+                            <a:latin typeface="Cambria Math"/>
+                            <a:ea typeface="Cambria Math"/>
+                            <a:cs typeface="Cambria Math"/>
+                          </a:rPr>
+                          <m:t>8</m:t>
+                        </m:r>
+                        <m:r>
+                          <a:rPr lang="en-GB" sz="2100" dirty="0">
                             <a:solidFill>
                               <a:srgbClr val="102B46"/>
                             </a:solidFill>
@@ -4283,9 +4562,8 @@
                         </m:r>
                         <m:f>
                           <m:fPr>
-                            <m:type m:val="bar"/>
                             <m:ctrlPr>
-                              <a:rPr lang="en" sz="2100" dirty="0">
+                              <a:rPr lang="en-GB" sz="2100" dirty="0">
                                 <a:solidFill>
                                   <a:srgbClr val="102B46"/>
                                 </a:solidFill>
@@ -4300,11 +4578,8 @@
                               <m:naryPr>
                                 <m:chr m:val="∑"/>
                                 <m:limLoc m:val="undOvr"/>
-                                <m:grow m:val="off"/>
-                                <m:subHide m:val="off"/>
-                                <m:supHide m:val="off"/>
                                 <m:ctrlPr>
-                                  <a:rPr lang="en" sz="2100" dirty="0">
+                                  <a:rPr lang="en-GB" sz="2100" dirty="0">
                                     <a:solidFill>
                                       <a:srgbClr val="102B46"/>
                                     </a:solidFill>
@@ -4316,7 +4591,7 @@
                               </m:naryPr>
                               <m:sub>
                                 <m:r>
-                                  <a:rPr lang="en" sz="2100" dirty="0">
+                                  <a:rPr lang="en-GB" sz="2100" dirty="0">
                                     <a:solidFill>
                                       <a:srgbClr val="102B46"/>
                                     </a:solidFill>
@@ -4324,13 +4599,10 @@
                                     <a:ea typeface="Cambria Math"/>
                                     <a:cs typeface="Cambria Math"/>
                                   </a:rPr>
-                                  <m:t>j</m:t>
+                                  <m:t>𝑗</m:t>
                                 </m:r>
                                 <m:r>
-                                  <m:rPr>
-                                    <m:sty m:val="p"/>
-                                  </m:rPr>
-                                  <a:rPr lang="en" sz="2100" dirty="0">
+                                  <a:rPr lang="en-GB" sz="2100" dirty="0">
                                     <a:solidFill>
                                       <a:srgbClr val="102B46"/>
                                     </a:solidFill>
@@ -4341,7 +4613,7 @@
                                   <m:t>=</m:t>
                                 </m:r>
                                 <m:r>
-                                  <a:rPr lang="en" sz="2100" dirty="0">
+                                  <a:rPr lang="en-GB" sz="2100" dirty="0">
                                     <a:solidFill>
                                       <a:srgbClr val="102B46"/>
                                     </a:solidFill>
@@ -4354,7 +4626,7 @@
                               </m:sub>
                               <m:sup>
                                 <m:r>
-                                  <a:rPr lang="en" sz="2100" dirty="0">
+                                  <a:rPr lang="en-GB" sz="2100" dirty="0">
                                     <a:solidFill>
                                       <a:srgbClr val="102B46"/>
                                     </a:solidFill>
@@ -4362,14 +4634,19 @@
                                     <a:ea typeface="Cambria Math"/>
                                     <a:cs typeface="Cambria Math"/>
                                   </a:rPr>
-                                  <m:t>K</m:t>
+                                  <m:t>𝐾</m:t>
                                 </m:r>
                               </m:sup>
                               <m:e>
                                 <m:sSub>
+                                  <m:sSubPr>
+                                    <m:ctrlPr>
+                                      <a:rPr/>
+                                    </m:ctrlPr>
+                                  </m:sSubPr>
                                   <m:e>
                                     <m:r>
-                                      <a:rPr lang="en" sz="2100" dirty="0">
+                                      <a:rPr lang="en-GB" sz="2100" dirty="0">
                                         <a:solidFill>
                                           <a:srgbClr val="102B46"/>
                                         </a:solidFill>
@@ -4377,12 +4654,12 @@
                                         <a:ea typeface="Cambria Math"/>
                                         <a:cs typeface="Cambria Math"/>
                                       </a:rPr>
-                                      <m:t>R</m:t>
+                                      <m:t>𝑅</m:t>
                                     </m:r>
                                   </m:e>
                                   <m:sub>
                                     <m:r>
-                                      <a:rPr lang="en" sz="2100" dirty="0">
+                                      <a:rPr lang="en-GB" sz="2100" dirty="0">
                                         <a:solidFill>
                                           <a:srgbClr val="102B46"/>
                                         </a:solidFill>
@@ -4390,14 +4667,19 @@
                                         <a:ea typeface="Cambria Math"/>
                                         <a:cs typeface="Cambria Math"/>
                                       </a:rPr>
-                                      <m:t>j</m:t>
+                                      <m:t>𝑗</m:t>
                                     </m:r>
                                   </m:sub>
                                 </m:sSub>
                                 <m:sSubSup>
+                                  <m:sSubSupPr>
+                                    <m:ctrlPr>
+                                      <a:rPr/>
+                                    </m:ctrlPr>
+                                  </m:sSubSupPr>
                                   <m:e>
                                     <m:r>
-                                      <a:rPr lang="en" sz="2100" dirty="0">
+                                      <a:rPr lang="en-GB" sz="2100" dirty="0">
                                         <a:solidFill>
                                           <a:srgbClr val="102B46"/>
                                         </a:solidFill>
@@ -4405,12 +4687,12 @@
                                         <a:ea typeface="Cambria Math"/>
                                         <a:cs typeface="Cambria Math"/>
                                       </a:rPr>
-                                      <m:t>L</m:t>
+                                      <m:t>𝐿</m:t>
                                     </m:r>
                                   </m:e>
                                   <m:sub>
                                     <m:r>
-                                      <a:rPr lang="en" sz="2100" dirty="0">
+                                      <a:rPr lang="en-GB" sz="2100" dirty="0">
                                         <a:solidFill>
                                           <a:srgbClr val="102B46"/>
                                         </a:solidFill>
@@ -4418,12 +4700,12 @@
                                         <a:ea typeface="Cambria Math"/>
                                         <a:cs typeface="Cambria Math"/>
                                       </a:rPr>
-                                      <m:t>j</m:t>
+                                      <m:t>𝑗</m:t>
                                     </m:r>
                                   </m:sub>
                                   <m:sup>
                                     <m:r>
-                                      <a:rPr lang="en" sz="2100" dirty="0">
+                                      <a:rPr lang="en-GB" sz="2100" dirty="0">
                                         <a:solidFill>
                                           <a:srgbClr val="102B46"/>
                                         </a:solidFill>
@@ -4431,7 +4713,7 @@
                                         <a:ea typeface="Cambria Math"/>
                                         <a:cs typeface="Cambria Math"/>
                                       </a:rPr>
-                                      <m:t>p</m:t>
+                                      <m:t>𝑝</m:t>
                                     </m:r>
                                   </m:sup>
                                 </m:sSubSup>
@@ -4443,11 +4725,8 @@
                               <m:naryPr>
                                 <m:chr m:val="∑"/>
                                 <m:limLoc m:val="undOvr"/>
-                                <m:grow m:val="off"/>
-                                <m:subHide m:val="off"/>
-                                <m:supHide m:val="off"/>
                                 <m:ctrlPr>
-                                  <a:rPr lang="en" sz="2100" dirty="0">
+                                  <a:rPr lang="en-GB" sz="2100" dirty="0">
                                     <a:solidFill>
                                       <a:srgbClr val="102B46"/>
                                     </a:solidFill>
@@ -4459,7 +4738,7 @@
                               </m:naryPr>
                               <m:sub>
                                 <m:r>
-                                  <a:rPr lang="en" sz="2100" dirty="0">
+                                  <a:rPr lang="en-GB" sz="2100" dirty="0">
                                     <a:solidFill>
                                       <a:srgbClr val="102B46"/>
                                     </a:solidFill>
@@ -4467,13 +4746,10 @@
                                     <a:ea typeface="Cambria Math"/>
                                     <a:cs typeface="Cambria Math"/>
                                   </a:rPr>
-                                  <m:t>j</m:t>
+                                  <m:t>𝑗</m:t>
                                 </m:r>
                                 <m:r>
-                                  <m:rPr>
-                                    <m:sty m:val="p"/>
-                                  </m:rPr>
-                                  <a:rPr lang="en" sz="2100" dirty="0">
+                                  <a:rPr lang="en-GB" sz="2100" dirty="0">
                                     <a:solidFill>
                                       <a:srgbClr val="102B46"/>
                                     </a:solidFill>
@@ -4484,7 +4760,7 @@
                                   <m:t>=</m:t>
                                 </m:r>
                                 <m:r>
-                                  <a:rPr lang="en" sz="2100" dirty="0">
+                                  <a:rPr lang="en-GB" sz="2100" dirty="0">
                                     <a:solidFill>
                                       <a:srgbClr val="102B46"/>
                                     </a:solidFill>
@@ -4497,7 +4773,7 @@
                               </m:sub>
                               <m:sup>
                                 <m:r>
-                                  <a:rPr lang="en" sz="2100" dirty="0">
+                                  <a:rPr lang="en-GB" sz="2100" dirty="0">
                                     <a:solidFill>
                                       <a:srgbClr val="102B46"/>
                                     </a:solidFill>
@@ -4505,14 +4781,19 @@
                                     <a:ea typeface="Cambria Math"/>
                                     <a:cs typeface="Cambria Math"/>
                                   </a:rPr>
-                                  <m:t>K</m:t>
+                                  <m:t>𝐾</m:t>
                                 </m:r>
                               </m:sup>
                               <m:e>
                                 <m:sSubSup>
+                                  <m:sSubSupPr>
+                                    <m:ctrlPr>
+                                      <a:rPr/>
+                                    </m:ctrlPr>
+                                  </m:sSubSupPr>
                                   <m:e>
                                     <m:r>
-                                      <a:rPr lang="en" sz="2100" dirty="0">
+                                      <a:rPr lang="en-GB" sz="2100" dirty="0">
                                         <a:solidFill>
                                           <a:srgbClr val="102B46"/>
                                         </a:solidFill>
@@ -4520,12 +4801,12 @@
                                         <a:ea typeface="Cambria Math"/>
                                         <a:cs typeface="Cambria Math"/>
                                       </a:rPr>
-                                      <m:t>L</m:t>
+                                      <m:t>𝐿</m:t>
                                     </m:r>
                                   </m:e>
                                   <m:sub>
                                     <m:r>
-                                      <a:rPr lang="en" sz="2100" dirty="0">
+                                      <a:rPr lang="en-GB" sz="2100" dirty="0">
                                         <a:solidFill>
                                           <a:srgbClr val="102B46"/>
                                         </a:solidFill>
@@ -4533,12 +4814,12 @@
                                         <a:ea typeface="Cambria Math"/>
                                         <a:cs typeface="Cambria Math"/>
                                       </a:rPr>
-                                      <m:t>j</m:t>
+                                      <m:t>𝑗</m:t>
                                     </m:r>
                                   </m:sub>
                                   <m:sup>
                                     <m:r>
-                                      <a:rPr lang="en" sz="2100" dirty="0">
+                                      <a:rPr lang="en-GB" sz="2100" dirty="0">
                                         <a:solidFill>
                                           <a:srgbClr val="102B46"/>
                                         </a:solidFill>
@@ -4546,7 +4827,7 @@
                                         <a:ea typeface="Cambria Math"/>
                                         <a:cs typeface="Cambria Math"/>
                                       </a:rPr>
-                                      <m:t>p</m:t>
+                                      <m:t>𝑝</m:t>
                                     </m:r>
                                   </m:sup>
                                 </m:sSubSup>
@@ -4555,10 +4836,7 @@
                           </m:den>
                         </m:f>
                         <m:r>
-                          <m:rPr>
-                            <m:sty m:val="p"/>
-                          </m:rPr>
-                          <a:rPr lang="en" sz="2100" dirty="0">
+                          <a:rPr lang="en-GB" sz="2100" dirty="0">
                             <a:solidFill>
                               <a:srgbClr val="102B46"/>
                             </a:solidFill>
@@ -4569,7 +4847,7 @@
                           <m:t>≤</m:t>
                         </m:r>
                         <m:r>
-                          <a:rPr lang="en" sz="2100" dirty="0">
+                          <a:rPr lang="en-GB" sz="2100" dirty="0">
                             <a:solidFill>
                               <a:srgbClr val="102B46"/>
                             </a:solidFill>
@@ -4577,7 +4855,29 @@
                             <a:ea typeface="Cambria Math"/>
                             <a:cs typeface="Cambria Math"/>
                           </a:rPr>
-                          <m:t>3.0</m:t>
+                          <m:t>3</m:t>
+                        </m:r>
+                        <m:r>
+                          <a:rPr lang="en-GB" sz="2100" dirty="0">
+                            <a:solidFill>
+                              <a:srgbClr val="102B46"/>
+                            </a:solidFill>
+                            <a:latin typeface="Cambria Math"/>
+                            <a:ea typeface="Cambria Math"/>
+                            <a:cs typeface="Cambria Math"/>
+                          </a:rPr>
+                          <m:t>.</m:t>
+                        </m:r>
+                        <m:r>
+                          <a:rPr lang="en-GB" sz="2100" dirty="0">
+                            <a:solidFill>
+                              <a:srgbClr val="102B46"/>
+                            </a:solidFill>
+                            <a:latin typeface="Cambria Math"/>
+                            <a:ea typeface="Cambria Math"/>
+                            <a:cs typeface="Cambria Math"/>
+                          </a:rPr>
+                          <m:t>0</m:t>
                         </m:r>
                       </m:oMath>
                     </m:oMathPara>
@@ -4586,6 +4886,44 @@
               </p:txBody>
             </p:sp>
           </mc:Choice>
+          <mc:Fallback>
+            <p:sp>
+              <p:nvSpPr>
+                <p:cNvPr id="28" name="aggregate-clr-equation"/>
+                <p:cNvSpPr txBox="1">
+                  <a:spLocks noRot="1" noChangeAspect="1" noMove="1" noResize="1" noEditPoints="1" noAdjustHandles="1" noChangeArrowheads="1" noChangeShapeType="1" noTextEdit="1"/>
+                </p:cNvSpPr>
+                <p:nvPr/>
+              </p:nvSpPr>
+              <p:spPr>
+                <a:xfrm>
+                  <a:off x="571500" y="4552950"/>
+                  <a:ext cx="5619750" cy="781050"/>
+                </a:xfrm>
+                <a:prstGeom prst="rect">
+                  <a:avLst/>
+                </a:prstGeom>
+                <a:blipFill rotWithShape="1">
+                  <a:blip r:embed="rId1"/>
+                </a:blipFill>
+                <a:ln>
+                  <a:noFill/>
+                </a:ln>
+              </p:spPr>
+              <p:txBody>
+                <a:bodyPr/>
+                <a:lstStyle/>
+                <a:p>
+                  <a:r>
+                    <a:rPr lang="zh-CN" altLang="en-US">
+                      <a:noFill/>
+                    </a:rPr>
+                    <a:t> </a:t>
+                  </a:r>
+                </a:p>
+              </p:txBody>
+            </p:sp>
+          </mc:Fallback>
         </mc:AlternateContent>
         <p:sp>
           <p:nvSpPr>
@@ -4614,7 +4952,7 @@
             <a:p>
               <a:pPr algn="l"/>
               <a:r>
-                <a:rPr lang="en" sz="1650" b="1" dirty="0">
+                <a:rPr lang="en-GB" sz="1650" b="1" dirty="0">
                   <a:solidFill>
                     <a:schemeClr val="accent1"/>
                   </a:solidFill>
@@ -4624,6 +4962,14 @@
                 </a:rPr>
                 <a:t>Minimize annualized cost and EENS</a:t>
               </a:r>
+              <a:endParaRPr lang="en-GB" sz="1650" b="1" dirty="0">
+                <a:solidFill>
+                  <a:schemeClr val="accent1"/>
+                </a:solidFill>
+                <a:latin typeface="+mn-lt"/>
+                <a:ea typeface="+mn-ea"/>
+                <a:cs typeface="+mn-cs"/>
+              </a:endParaRPr>
             </a:p>
           </p:txBody>
         </p:sp>
@@ -4654,7 +5000,7 @@
             <a:p>
               <a:pPr algn="l"/>
               <a:r>
-                <a:rPr lang="en" sz="1350" dirty="0">
+                <a:rPr lang="en-GB" sz="1350" dirty="0">
                   <a:solidFill>
                     <a:schemeClr val="accent5"/>
                   </a:solidFill>
@@ -4664,6 +5010,14 @@
                 </a:rPr>
                 <a:t>million CNY/yr · MWh/yr · N−1 supply inadequacy</a:t>
               </a:r>
+              <a:endParaRPr lang="en-GB" sz="1350" dirty="0">
+                <a:solidFill>
+                  <a:schemeClr val="accent5"/>
+                </a:solidFill>
+                <a:latin typeface="+mn-lt"/>
+                <a:ea typeface="+mn-ea"/>
+                <a:cs typeface="+mn-cs"/>
+              </a:endParaRPr>
             </a:p>
           </p:txBody>
         </p:sp>
@@ -4709,7 +5063,7 @@
             <a:p>
               <a:pPr algn="l"/>
               <a:r>
-                <a:rPr lang="en" sz="1350" dirty="0">
+                <a:rPr lang="en-GB" sz="1350" dirty="0">
                   <a:solidFill>
                     <a:schemeClr val="accent5"/>
                   </a:solidFill>
@@ -4719,6 +5073,14 @@
                 </a:rPr>
                 <a:t>Selected CLR</a:t>
               </a:r>
+              <a:endParaRPr lang="en-GB" sz="1350" dirty="0">
+                <a:solidFill>
+                  <a:schemeClr val="accent5"/>
+                </a:solidFill>
+                <a:latin typeface="+mn-lt"/>
+                <a:ea typeface="+mn-ea"/>
+                <a:cs typeface="+mn-cs"/>
+              </a:endParaRPr>
             </a:p>
           </p:txBody>
         </p:sp>
@@ -5492,7 +5854,7 @@
               <a:p>
                 <a:pPr algn="r"/>
                 <a:r>
-                  <a:rPr lang="en" sz="1350" dirty="0">
+                  <a:rPr lang="en-GB" sz="1350" dirty="0">
                     <a:solidFill>
                       <a:schemeClr val="accent5"/>
                     </a:solidFill>
@@ -5502,6 +5864,14 @@
                   </a:rPr>
                   <a:t>3.0</a:t>
                 </a:r>
+                <a:endParaRPr lang="en-GB" sz="1350" dirty="0">
+                  <a:solidFill>
+                    <a:schemeClr val="accent5"/>
+                  </a:solidFill>
+                  <a:latin typeface="+mn-lt"/>
+                  <a:ea typeface="+mn-ea"/>
+                  <a:cs typeface="+mn-cs"/>
+                </a:endParaRPr>
               </a:p>
             </p:txBody>
           </p:sp>
@@ -5532,7 +5902,7 @@
               <a:p>
                 <a:pPr algn="r"/>
                 <a:r>
-                  <a:rPr lang="en" sz="1350" dirty="0">
+                  <a:rPr lang="en-GB" sz="1350" dirty="0">
                     <a:solidFill>
                       <a:schemeClr val="accent5"/>
                     </a:solidFill>
@@ -5542,6 +5912,14 @@
                   </a:rPr>
                   <a:t>2.4</a:t>
                 </a:r>
+                <a:endParaRPr lang="en-GB" sz="1350" dirty="0">
+                  <a:solidFill>
+                    <a:schemeClr val="accent5"/>
+                  </a:solidFill>
+                  <a:latin typeface="+mn-lt"/>
+                  <a:ea typeface="+mn-ea"/>
+                  <a:cs typeface="+mn-cs"/>
+                </a:endParaRPr>
               </a:p>
             </p:txBody>
           </p:sp>
@@ -5572,7 +5950,7 @@
               <a:p>
                 <a:pPr algn="r"/>
                 <a:r>
-                  <a:rPr lang="en" sz="1350" dirty="0">
+                  <a:rPr lang="en-GB" sz="1350" dirty="0">
                     <a:solidFill>
                       <a:schemeClr val="accent5"/>
                     </a:solidFill>
@@ -5582,6 +5960,14 @@
                   </a:rPr>
                   <a:t>1.8</a:t>
                 </a:r>
+                <a:endParaRPr lang="en-GB" sz="1350" dirty="0">
+                  <a:solidFill>
+                    <a:schemeClr val="accent5"/>
+                  </a:solidFill>
+                  <a:latin typeface="+mn-lt"/>
+                  <a:ea typeface="+mn-ea"/>
+                  <a:cs typeface="+mn-cs"/>
+                </a:endParaRPr>
               </a:p>
             </p:txBody>
           </p:sp>
@@ -5612,7 +5998,7 @@
               <a:p>
                 <a:pPr algn="r"/>
                 <a:r>
-                  <a:rPr lang="en" sz="1350" dirty="0">
+                  <a:rPr lang="en-GB" sz="1350" dirty="0">
                     <a:solidFill>
                       <a:schemeClr val="accent5"/>
                     </a:solidFill>
@@ -5622,6 +6008,14 @@
                   </a:rPr>
                   <a:t>1.2</a:t>
                 </a:r>
+                <a:endParaRPr lang="en-GB" sz="1350" dirty="0">
+                  <a:solidFill>
+                    <a:schemeClr val="accent5"/>
+                  </a:solidFill>
+                  <a:latin typeface="+mn-lt"/>
+                  <a:ea typeface="+mn-ea"/>
+                  <a:cs typeface="+mn-cs"/>
+                </a:endParaRPr>
               </a:p>
             </p:txBody>
           </p:sp>
@@ -5667,7 +6061,7 @@
               <a:p>
                 <a:pPr algn="ctr"/>
                 <a:r>
-                  <a:rPr lang="en" sz="1350" dirty="0">
+                  <a:rPr lang="en-GB" sz="1350" dirty="0">
                     <a:solidFill>
                       <a:schemeClr val="accent5"/>
                     </a:solidFill>
@@ -5677,6 +6071,14 @@
                   </a:rPr>
                   <a:t>1.7</a:t>
                 </a:r>
+                <a:endParaRPr lang="en-GB" sz="1350" dirty="0">
+                  <a:solidFill>
+                    <a:schemeClr val="accent5"/>
+                  </a:solidFill>
+                  <a:latin typeface="+mn-lt"/>
+                  <a:ea typeface="+mn-ea"/>
+                  <a:cs typeface="+mn-cs"/>
+                </a:endParaRPr>
               </a:p>
             </p:txBody>
           </p:sp>
@@ -5707,7 +6109,7 @@
               <a:p>
                 <a:pPr algn="ctr"/>
                 <a:r>
-                  <a:rPr lang="en" sz="1350" dirty="0">
+                  <a:rPr lang="en-GB" sz="1350" dirty="0">
                     <a:solidFill>
                       <a:schemeClr val="accent5"/>
                     </a:solidFill>
@@ -5717,6 +6119,14 @@
                   </a:rPr>
                   <a:t>2.0</a:t>
                 </a:r>
+                <a:endParaRPr lang="en-GB" sz="1350" dirty="0">
+                  <a:solidFill>
+                    <a:schemeClr val="accent5"/>
+                  </a:solidFill>
+                  <a:latin typeface="+mn-lt"/>
+                  <a:ea typeface="+mn-ea"/>
+                  <a:cs typeface="+mn-cs"/>
+                </a:endParaRPr>
               </a:p>
             </p:txBody>
           </p:sp>
@@ -5747,7 +6157,7 @@
               <a:p>
                 <a:pPr algn="ctr"/>
                 <a:r>
-                  <a:rPr lang="en" sz="1350" dirty="0">
+                  <a:rPr lang="en-GB" sz="1350" dirty="0">
                     <a:solidFill>
                       <a:schemeClr val="accent5"/>
                     </a:solidFill>
@@ -5757,6 +6167,14 @@
                   </a:rPr>
                   <a:t>2.5</a:t>
                 </a:r>
+                <a:endParaRPr lang="en-GB" sz="1350" dirty="0">
+                  <a:solidFill>
+                    <a:schemeClr val="accent5"/>
+                  </a:solidFill>
+                  <a:latin typeface="+mn-lt"/>
+                  <a:ea typeface="+mn-ea"/>
+                  <a:cs typeface="+mn-cs"/>
+                </a:endParaRPr>
               </a:p>
             </p:txBody>
           </p:sp>
@@ -5787,7 +6205,7 @@
               <a:p>
                 <a:pPr algn="ctr"/>
                 <a:r>
-                  <a:rPr lang="en" sz="1350" dirty="0">
+                  <a:rPr lang="en-GB" sz="1350" dirty="0">
                     <a:solidFill>
                       <a:schemeClr val="accent5"/>
                     </a:solidFill>
@@ -5797,6 +6215,14 @@
                   </a:rPr>
                   <a:t>3.0</a:t>
                 </a:r>
+                <a:endParaRPr lang="en-GB" sz="1350" dirty="0">
+                  <a:solidFill>
+                    <a:schemeClr val="accent5"/>
+                  </a:solidFill>
+                  <a:latin typeface="+mn-lt"/>
+                  <a:ea typeface="+mn-ea"/>
+                  <a:cs typeface="+mn-cs"/>
+                </a:endParaRPr>
               </a:p>
             </p:txBody>
           </p:sp>
@@ -5827,7 +6253,7 @@
               <a:p>
                 <a:pPr algn="ctr"/>
                 <a:r>
-                  <a:rPr lang="en" sz="1350" dirty="0">
+                  <a:rPr lang="en-GB" sz="1350" dirty="0">
                     <a:solidFill>
                       <a:schemeClr val="accent5"/>
                     </a:solidFill>
@@ -5837,6 +6263,14 @@
                   </a:rPr>
                   <a:t>3.6</a:t>
                 </a:r>
+                <a:endParaRPr lang="en-GB" sz="1350" dirty="0">
+                  <a:solidFill>
+                    <a:schemeClr val="accent5"/>
+                  </a:solidFill>
+                  <a:latin typeface="+mn-lt"/>
+                  <a:ea typeface="+mn-ea"/>
+                  <a:cs typeface="+mn-cs"/>
+                </a:endParaRPr>
               </a:p>
             </p:txBody>
           </p:sp>
@@ -5868,7 +6302,7 @@
             <a:p>
               <a:pPr algn="ctr"/>
               <a:r>
-                <a:rPr lang="en" sz="1350" dirty="0">
+                <a:rPr lang="en-GB" sz="1350" dirty="0">
                   <a:solidFill>
                     <a:schemeClr val="accent5"/>
                   </a:solidFill>
@@ -5878,6 +6312,14 @@
                 </a:rPr>
                 <a:t>Source-load ratio</a:t>
               </a:r>
+              <a:endParaRPr lang="en-GB" sz="1350" dirty="0">
+                <a:solidFill>
+                  <a:schemeClr val="accent5"/>
+                </a:solidFill>
+                <a:latin typeface="+mn-lt"/>
+                <a:ea typeface="+mn-ea"/>
+                <a:cs typeface="+mn-cs"/>
+              </a:endParaRPr>
             </a:p>
           </p:txBody>
         </p:sp>
@@ -5908,7 +6350,7 @@
             <a:p>
               <a:pPr algn="r"/>
               <a:r>
-                <a:rPr lang="en" sz="1350" dirty="0">
+                <a:rPr lang="en-GB" sz="1350" dirty="0">
                   <a:solidFill>
                     <a:schemeClr val="accent5"/>
                   </a:solidFill>
@@ -5918,6 +6360,14 @@
                 </a:rPr>
                 <a:t>2.0 cap reference</a:t>
               </a:r>
+              <a:endParaRPr lang="en-GB" sz="1350" dirty="0">
+                <a:solidFill>
+                  <a:schemeClr val="accent5"/>
+                </a:solidFill>
+                <a:latin typeface="+mn-lt"/>
+                <a:ea typeface="+mn-ea"/>
+                <a:cs typeface="+mn-cs"/>
+              </a:endParaRPr>
             </a:p>
           </p:txBody>
         </p:sp>
@@ -5948,7 +6398,7 @@
             <a:p>
               <a:pPr algn="l"/>
               <a:r>
-                <a:rPr lang="en" sz="1650" dirty="0">
+                <a:rPr lang="en-GB" sz="1650" dirty="0">
                   <a:solidFill>
                     <a:schemeClr val="accent1"/>
                   </a:solidFill>
@@ -5958,6 +6408,14 @@
                 </a:rPr>
                 <a:t>20 stations · Selected CLR 1.55–2.64</a:t>
               </a:r>
+              <a:endParaRPr lang="en-GB" sz="1650" dirty="0">
+                <a:solidFill>
+                  <a:schemeClr val="accent1"/>
+                </a:solidFill>
+                <a:latin typeface="+mn-lt"/>
+                <a:ea typeface="+mn-ea"/>
+                <a:cs typeface="+mn-cs"/>
+              </a:endParaRPr>
             </a:p>
           </p:txBody>
         </p:sp>
@@ -5988,7 +6446,7 @@
             <a:p>
               <a:pPr algn="l"/>
               <a:r>
-                <a:rPr lang="en" sz="1200" dirty="0">
+                <a:rPr lang="en-GB" sz="1200" dirty="0">
                   <a:solidFill>
                     <a:schemeClr val="accent5"/>
                   </a:solidFill>
@@ -5998,6 +6456,14 @@
                 </a:rPr>
                 <a:t>Source-load ratio = installed PV capacity / current peak load</a:t>
               </a:r>
+              <a:endParaRPr lang="en-GB" sz="1200" dirty="0">
+                <a:solidFill>
+                  <a:schemeClr val="accent5"/>
+                </a:solidFill>
+                <a:latin typeface="+mn-lt"/>
+                <a:ea typeface="+mn-ea"/>
+                <a:cs typeface="+mn-cs"/>
+              </a:endParaRPr>
             </a:p>
           </p:txBody>
         </p:sp>
@@ -6043,7 +6509,7 @@
             <a:p>
               <a:pPr algn="l"/>
               <a:r>
-                <a:rPr lang="en" sz="1350" dirty="0">
+                <a:rPr lang="en-GB" sz="1350" dirty="0">
                   <a:solidFill>
                     <a:schemeClr val="accent5"/>
                   </a:solidFill>
@@ -6053,6 +6519,14 @@
                 </a:rPr>
                 <a:t>Constraints: station reverse flow · aggregate CLR band · optional upstream reverse-flow limit</a:t>
               </a:r>
+              <a:endParaRPr lang="en-GB" sz="1350" dirty="0">
+                <a:solidFill>
+                  <a:schemeClr val="accent5"/>
+                </a:solidFill>
+                <a:latin typeface="+mn-lt"/>
+                <a:ea typeface="+mn-ea"/>
+                <a:cs typeface="+mn-cs"/>
+              </a:endParaRPr>
             </a:p>
           </p:txBody>
         </p:sp>
@@ -6098,7 +6572,7 @@
             <a:p>
               <a:pPr algn="l"/>
               <a:r>
-                <a:rPr lang="en" sz="1050" dirty="0">
+                <a:rPr lang="en-GB" sz="1050" dirty="0">
                   <a:solidFill>
                     <a:schemeClr val="accent5"/>
                   </a:solidFill>
@@ -6108,6 +6582,14 @@
                 </a:rPr>
                 <a:t>Source: camera-ready paper, Sections I–II and Fig. 1. Public-data benchmark; all 20 station records shown.</a:t>
               </a:r>
+              <a:endParaRPr lang="en-GB" sz="1050" dirty="0">
+                <a:solidFill>
+                  <a:schemeClr val="accent5"/>
+                </a:solidFill>
+                <a:latin typeface="+mn-lt"/>
+                <a:ea typeface="+mn-ea"/>
+                <a:cs typeface="+mn-cs"/>
+              </a:endParaRPr>
             </a:p>
           </p:txBody>
         </p:sp>
@@ -6138,7 +6620,7 @@
             <a:p>
               <a:pPr algn="r"/>
               <a:r>
-                <a:rPr lang="en" sz="1050" dirty="0">
+                <a:rPr lang="en-GB" sz="1050" dirty="0">
                   <a:solidFill>
                     <a:schemeClr val="accent5"/>
                   </a:solidFill>
@@ -6148,6 +6630,14 @@
                 </a:rPr>
                 <a:t>02 / 05</a:t>
               </a:r>
+              <a:endParaRPr lang="en-GB" sz="1050" dirty="0">
+                <a:solidFill>
+                  <a:schemeClr val="accent5"/>
+                </a:solidFill>
+                <a:latin typeface="+mn-lt"/>
+                <a:ea typeface="+mn-ea"/>
+                <a:cs typeface="+mn-cs"/>
+              </a:endParaRPr>
             </a:p>
           </p:txBody>
         </p:sp>
@@ -6157,9 +6647,18 @@
   <p:clrMapOvr>
     <a:masterClrMapping/>
   </p:clrMapOvr>
-  <p:transition xmlns:p14="http://schemas.microsoft.com/office/powerpoint/2010/main" p14:dur="400">
-    <p:fade/>
-  </p:transition>
+  <mc:AlternateContent xmlns:mc="http://schemas.openxmlformats.org/markup-compatibility/2006">
+    <mc:Choice xmlns:p14="http://schemas.microsoft.com/office/powerpoint/2010/main" Requires="p14">
+      <p:transition p14:dur="400">
+        <p:fade/>
+      </p:transition>
+    </mc:Choice>
+    <mc:Fallback>
+      <p:transition>
+        <p:fade/>
+      </p:transition>
+    </mc:Fallback>
+  </mc:AlternateContent>
 </p:sld>
 </file>
 
@@ -6229,7 +6728,7 @@
             <a:p>
               <a:pPr algn="l"/>
               <a:r>
-                <a:rPr lang="en" sz="1350" b="1" dirty="0">
+                <a:rPr lang="en-GB" sz="1350" b="1" dirty="0">
                   <a:solidFill>
                     <a:schemeClr val="accent2"/>
                   </a:solidFill>
@@ -6239,6 +6738,14 @@
                 </a:rPr>
                 <a:t>02 / PROPOSED SOLUTION</a:t>
               </a:r>
+              <a:endParaRPr lang="en-GB" sz="1350" b="1" dirty="0">
+                <a:solidFill>
+                  <a:schemeClr val="accent2"/>
+                </a:solidFill>
+                <a:latin typeface="+mn-lt"/>
+                <a:ea typeface="+mn-ea"/>
+                <a:cs typeface="+mn-cs"/>
+              </a:endParaRPr>
             </a:p>
           </p:txBody>
         </p:sp>
@@ -6269,7 +6776,7 @@
             <a:p>
               <a:pPr algn="l"/>
               <a:r>
-                <a:rPr lang="en" sz="3150" b="1" dirty="0">
+                <a:rPr lang="en-GB" sz="3150" b="1" dirty="0">
                   <a:solidFill>
                     <a:schemeClr val="accent1"/>
                   </a:solidFill>
@@ -6279,6 +6786,14 @@
                 </a:rPr>
                 <a:t>Engineering priors guide the search</a:t>
               </a:r>
+              <a:endParaRPr lang="en-GB" sz="3150" b="1" dirty="0">
+                <a:solidFill>
+                  <a:schemeClr val="accent1"/>
+                </a:solidFill>
+                <a:latin typeface="+mn-lt"/>
+                <a:ea typeface="+mn-ea"/>
+                <a:cs typeface="+mn-cs"/>
+              </a:endParaRPr>
             </a:p>
           </p:txBody>
         </p:sp>
@@ -6324,7 +6839,7 @@
             <a:p>
               <a:pPr algn="l"/>
               <a:r>
-                <a:rPr lang="en" sz="2100" dirty="0">
+                <a:rPr lang="en-GB" sz="2100" dirty="0">
                   <a:solidFill>
                     <a:schemeClr val="accent5"/>
                   </a:solidFill>
@@ -6332,10 +6847,10 @@
                   <a:ea typeface="+mn-ea"/>
                   <a:cs typeface="+mn-cs"/>
                 </a:rPr>
-                <a:t xml:space="preserve">Standard NSGA-II + </a:t>
+                <a:t>Standard NSGA-II + </a:t>
               </a:r>
               <a:r>
-                <a:rPr lang="en" sz="2100" b="1" dirty="0">
+                <a:rPr lang="en-GB" sz="2100" b="1" dirty="0">
                   <a:solidFill>
                     <a:schemeClr val="accent2"/>
                   </a:solidFill>
@@ -6346,7 +6861,7 @@
                 <a:t>engineering-prior seeding</a:t>
               </a:r>
               <a:r>
-                <a:rPr lang="en" sz="2100" dirty="0">
+                <a:rPr lang="en-GB" sz="2100" dirty="0">
                   <a:solidFill>
                     <a:schemeClr val="accent5"/>
                   </a:solidFill>
@@ -6354,10 +6869,10 @@
                   <a:ea typeface="+mn-ea"/>
                   <a:cs typeface="+mn-cs"/>
                 </a:rPr>
-                <a:t xml:space="preserve"> + </a:t>
+                <a:t> + </a:t>
               </a:r>
               <a:r>
-                <a:rPr lang="en" sz="2100" b="1" dirty="0">
+                <a:rPr lang="en-GB" sz="2100" b="1" dirty="0">
                   <a:solidFill>
                     <a:schemeClr val="accent2"/>
                   </a:solidFill>
@@ -6367,6 +6882,14 @@
                 </a:rPr>
                 <a:t>feasibility repair</a:t>
               </a:r>
+              <a:endParaRPr lang="en-GB" sz="2100" b="1" dirty="0">
+                <a:solidFill>
+                  <a:schemeClr val="accent2"/>
+                </a:solidFill>
+                <a:latin typeface="+mn-lt"/>
+                <a:ea typeface="+mn-ea"/>
+                <a:cs typeface="+mn-cs"/>
+              </a:endParaRPr>
             </a:p>
           </p:txBody>
         </p:sp>
@@ -6679,7 +7202,7 @@
               <a:p>
                 <a:pPr algn="ctr"/>
                 <a:r>
-                  <a:rPr lang="en" sz="2100" b="1" dirty="0">
+                  <a:rPr lang="en-GB" sz="2100" b="1" dirty="0">
                     <a:solidFill>
                       <a:srgbClr val="FFFFFF"/>
                     </a:solidFill>
@@ -6689,6 +7212,14 @@
                   </a:rPr>
                   <a:t>Seed &amp; repair</a:t>
                 </a:r>
+                <a:endParaRPr lang="en-GB" sz="2100" b="1" dirty="0">
+                  <a:solidFill>
+                    <a:srgbClr val="FFFFFF"/>
+                  </a:solidFill>
+                  <a:latin typeface="+mn-lt"/>
+                  <a:ea typeface="+mn-ea"/>
+                  <a:cs typeface="+mn-cs"/>
+                </a:endParaRPr>
               </a:p>
             </p:txBody>
           </p:sp>
@@ -6719,7 +7250,7 @@
               <a:p>
                 <a:pPr algn="ctr"/>
                 <a:r>
-                  <a:rPr lang="en" sz="2100" b="1" dirty="0">
+                  <a:rPr lang="en-GB" sz="2100" b="1" dirty="0">
                     <a:solidFill>
                       <a:schemeClr val="accent1"/>
                     </a:solidFill>
@@ -6729,6 +7260,14 @@
                   </a:rPr>
                   <a:t>Evaluate</a:t>
                 </a:r>
+                <a:endParaRPr lang="en-GB" sz="2100" b="1" dirty="0">
+                  <a:solidFill>
+                    <a:schemeClr val="accent1"/>
+                  </a:solidFill>
+                  <a:latin typeface="+mn-lt"/>
+                  <a:ea typeface="+mn-ea"/>
+                  <a:cs typeface="+mn-cs"/>
+                </a:endParaRPr>
               </a:p>
             </p:txBody>
           </p:sp>
@@ -6759,7 +7298,7 @@
               <a:p>
                 <a:pPr algn="ctr"/>
                 <a:r>
-                  <a:rPr lang="en" sz="2100" b="1" dirty="0">
+                  <a:rPr lang="en-GB" sz="2100" b="1" dirty="0">
                     <a:solidFill>
                       <a:schemeClr val="accent1"/>
                     </a:solidFill>
@@ -6769,6 +7308,14 @@
                   </a:rPr>
                   <a:t>Select</a:t>
                 </a:r>
+                <a:endParaRPr lang="en-GB" sz="2100" b="1" dirty="0">
+                  <a:solidFill>
+                    <a:schemeClr val="accent1"/>
+                  </a:solidFill>
+                  <a:latin typeface="+mn-lt"/>
+                  <a:ea typeface="+mn-ea"/>
+                  <a:cs typeface="+mn-cs"/>
+                </a:endParaRPr>
               </a:p>
             </p:txBody>
           </p:sp>
@@ -6799,7 +7346,7 @@
               <a:p>
                 <a:pPr algn="ctr"/>
                 <a:r>
-                  <a:rPr lang="en" sz="2100" b="1" dirty="0">
+                  <a:rPr lang="en-GB" sz="2100" b="1" dirty="0">
                     <a:solidFill>
                       <a:srgbClr val="FFFFFF"/>
                     </a:solidFill>
@@ -6809,6 +7356,14 @@
                   </a:rPr>
                   <a:t>Vary + repair</a:t>
                 </a:r>
+                <a:endParaRPr lang="en-GB" sz="2100" b="1" dirty="0">
+                  <a:solidFill>
+                    <a:srgbClr val="FFFFFF"/>
+                  </a:solidFill>
+                  <a:latin typeface="+mn-lt"/>
+                  <a:ea typeface="+mn-ea"/>
+                  <a:cs typeface="+mn-cs"/>
+                </a:endParaRPr>
               </a:p>
             </p:txBody>
           </p:sp>
@@ -6858,7 +7413,7 @@
                   </a:lnSpc>
                 </a:pPr>
                 <a:r>
-                  <a:rPr lang="en" sz="1350" dirty="0">
+                  <a:rPr lang="en-GB" sz="1350" dirty="0">
                     <a:solidFill>
                       <a:srgbClr val="FFFFFF"/>
                     </a:solidFill>
@@ -6869,7 +7424,7 @@
                   <a:t>Sample CLR</a:t>
                 </a:r>
                 <a:br>
-                  <a:rPr lang="en" sz="1350" dirty="0">
+                  <a:rPr lang="en-GB" sz="1350" dirty="0">
                     <a:solidFill>
                       <a:srgbClr val="FFFFFF"/>
                     </a:solidFill>
@@ -6879,7 +7434,7 @@
                   </a:rPr>
                 </a:br>
                 <a:r>
-                  <a:rPr lang="en" sz="1350" dirty="0">
+                  <a:rPr lang="en-GB" sz="1350" dirty="0">
                     <a:solidFill>
                       <a:srgbClr val="FFFFFF"/>
                     </a:solidFill>
@@ -6889,6 +7444,14 @@
                   </a:rPr>
                   <a:t>Start storage at zero</a:t>
                 </a:r>
+                <a:endParaRPr lang="en-GB" sz="1350" dirty="0">
+                  <a:solidFill>
+                    <a:srgbClr val="FFFFFF"/>
+                  </a:solidFill>
+                  <a:latin typeface="+mn-lt"/>
+                  <a:ea typeface="+mn-ea"/>
+                  <a:cs typeface="+mn-cs"/>
+                </a:endParaRPr>
               </a:p>
             </p:txBody>
           </p:sp>
@@ -6919,7 +7482,7 @@
               <a:p>
                 <a:pPr algn="ctr"/>
                 <a:r>
-                  <a:rPr lang="en" sz="1350" dirty="0">
+                  <a:rPr lang="en-GB" sz="1350" dirty="0">
                     <a:solidFill>
                       <a:schemeClr val="accent5"/>
                     </a:solidFill>
@@ -6929,6 +7492,14 @@
                   </a:rPr>
                   <a:t>Cost · EENS · Constraints</a:t>
                 </a:r>
+                <a:endParaRPr lang="en-GB" sz="1350" dirty="0">
+                  <a:solidFill>
+                    <a:schemeClr val="accent5"/>
+                  </a:solidFill>
+                  <a:latin typeface="+mn-lt"/>
+                  <a:ea typeface="+mn-ea"/>
+                  <a:cs typeface="+mn-cs"/>
+                </a:endParaRPr>
               </a:p>
             </p:txBody>
           </p:sp>
@@ -6959,7 +7530,7 @@
               <a:p>
                 <a:pPr algn="ctr"/>
                 <a:r>
-                  <a:rPr lang="en" sz="1350" dirty="0">
+                  <a:rPr lang="en-GB" sz="1350" dirty="0">
                     <a:solidFill>
                       <a:schemeClr val="accent5"/>
                     </a:solidFill>
@@ -6969,6 +7540,14 @@
                   </a:rPr>
                   <a:t>Non-dominated ranking</a:t>
                 </a:r>
+                <a:endParaRPr lang="en-GB" sz="1350" dirty="0">
+                  <a:solidFill>
+                    <a:schemeClr val="accent5"/>
+                  </a:solidFill>
+                  <a:latin typeface="+mn-lt"/>
+                  <a:ea typeface="+mn-ea"/>
+                  <a:cs typeface="+mn-cs"/>
+                </a:endParaRPr>
               </a:p>
             </p:txBody>
           </p:sp>
@@ -6999,7 +7578,7 @@
               <a:p>
                 <a:pPr algn="ctr"/>
                 <a:r>
-                  <a:rPr lang="en" sz="1350" dirty="0">
+                  <a:rPr lang="en-GB" sz="1350" dirty="0">
                     <a:solidFill>
                       <a:srgbClr val="FFFFFF"/>
                     </a:solidFill>
@@ -7009,6 +7588,14 @@
                   </a:rPr>
                   <a:t>Repair every offspring</a:t>
                 </a:r>
+                <a:endParaRPr lang="en-GB" sz="1350" dirty="0">
+                  <a:solidFill>
+                    <a:srgbClr val="FFFFFF"/>
+                  </a:solidFill>
+                  <a:latin typeface="+mn-lt"/>
+                  <a:ea typeface="+mn-ea"/>
+                  <a:cs typeface="+mn-cs"/>
+                </a:endParaRPr>
               </a:p>
             </p:txBody>
           </p:sp>
@@ -7039,7 +7626,7 @@
               <a:p>
                 <a:pPr algn="ctr"/>
                 <a:r>
-                  <a:rPr lang="en" sz="1350" dirty="0">
+                  <a:rPr lang="en-GB" sz="1350" dirty="0">
                     <a:solidFill>
                       <a:schemeClr val="accent5"/>
                     </a:solidFill>
@@ -7049,6 +7636,14 @@
                   </a:rPr>
                   <a:t>Repeated evolutionary search</a:t>
                 </a:r>
+                <a:endParaRPr lang="en-GB" sz="1350" dirty="0">
+                  <a:solidFill>
+                    <a:schemeClr val="accent5"/>
+                  </a:solidFill>
+                  <a:latin typeface="+mn-lt"/>
+                  <a:ea typeface="+mn-ea"/>
+                  <a:cs typeface="+mn-cs"/>
+                </a:endParaRPr>
               </a:p>
             </p:txBody>
           </p:sp>
@@ -7131,7 +7726,7 @@
             <a:p>
               <a:pPr algn="l"/>
               <a:r>
-                <a:rPr lang="en" sz="1350" b="1" dirty="0">
+                <a:rPr lang="en-GB" sz="1350" b="1" dirty="0">
                   <a:solidFill>
                     <a:schemeClr val="accent2"/>
                   </a:solidFill>
@@ -7141,6 +7736,14 @@
                 </a:rPr>
                 <a:t>ENGINEERING-PRIOR REPAIR</a:t>
               </a:r>
+              <a:endParaRPr lang="en-GB" sz="1350" b="1" dirty="0">
+                <a:solidFill>
+                  <a:schemeClr val="accent2"/>
+                </a:solidFill>
+                <a:latin typeface="+mn-lt"/>
+                <a:ea typeface="+mn-ea"/>
+                <a:cs typeface="+mn-cs"/>
+              </a:endParaRPr>
             </a:p>
           </p:txBody>
         </p:sp>
@@ -7185,7 +7788,7 @@
               <a:p>
                 <a:pPr algn="l"/>
                 <a:r>
-                  <a:rPr lang="en" sz="1800" b="1" dirty="0">
+                  <a:rPr lang="en-GB" sz="1800" b="1" dirty="0">
                     <a:solidFill>
                       <a:schemeClr val="accent1"/>
                     </a:solidFill>
@@ -7195,6 +7798,14 @@
                   </a:rPr>
                   <a:t>1 Aggregate CLR</a:t>
                 </a:r>
+                <a:endParaRPr lang="en-GB" sz="1800" b="1" dirty="0">
+                  <a:solidFill>
+                    <a:schemeClr val="accent1"/>
+                  </a:solidFill>
+                  <a:latin typeface="+mn-lt"/>
+                  <a:ea typeface="+mn-ea"/>
+                  <a:cs typeface="+mn-cs"/>
+                </a:endParaRPr>
               </a:p>
             </p:txBody>
           </p:sp>
@@ -7225,7 +7836,7 @@
               <a:p>
                 <a:pPr algn="l"/>
                 <a:r>
-                  <a:rPr lang="en" sz="1800" b="1" dirty="0">
+                  <a:rPr lang="en-GB" sz="1800" b="1" dirty="0">
                     <a:solidFill>
                       <a:schemeClr val="accent1"/>
                     </a:solidFill>
@@ -7235,6 +7846,14 @@
                   </a:rPr>
                   <a:t>2 Station reverse flow</a:t>
                 </a:r>
+                <a:endParaRPr lang="en-GB" sz="1800" b="1" dirty="0">
+                  <a:solidFill>
+                    <a:schemeClr val="accent1"/>
+                  </a:solidFill>
+                  <a:latin typeface="+mn-lt"/>
+                  <a:ea typeface="+mn-ea"/>
+                  <a:cs typeface="+mn-cs"/>
+                </a:endParaRPr>
               </a:p>
             </p:txBody>
           </p:sp>
@@ -7265,7 +7884,7 @@
               <a:p>
                 <a:pPr algn="l"/>
                 <a:r>
-                  <a:rPr lang="en" sz="1800" b="1" dirty="0">
+                  <a:rPr lang="en-GB" sz="1800" b="1" dirty="0">
                     <a:solidFill>
                       <a:schemeClr val="accent1"/>
                     </a:solidFill>
@@ -7275,6 +7894,14 @@
                   </a:rPr>
                   <a:t>3 Upstream limit</a:t>
                 </a:r>
+                <a:endParaRPr lang="en-GB" sz="1800" b="1" dirty="0">
+                  <a:solidFill>
+                    <a:schemeClr val="accent1"/>
+                  </a:solidFill>
+                  <a:latin typeface="+mn-lt"/>
+                  <a:ea typeface="+mn-ea"/>
+                  <a:cs typeface="+mn-cs"/>
+                </a:endParaRPr>
               </a:p>
             </p:txBody>
           </p:sp>
@@ -7320,7 +7947,7 @@
               <a:p>
                 <a:pPr algn="l"/>
                 <a:r>
-                  <a:rPr lang="en" sz="1500" dirty="0">
+                  <a:rPr lang="en-GB" sz="1500" dirty="0">
                     <a:solidFill>
                       <a:schemeClr val="accent5"/>
                     </a:solidFill>
@@ -7330,6 +7957,14 @@
                   </a:rPr>
                   <a:t>Bounded common offset</a:t>
                 </a:r>
+                <a:endParaRPr lang="en-GB" sz="1500" dirty="0">
+                  <a:solidFill>
+                    <a:schemeClr val="accent5"/>
+                  </a:solidFill>
+                  <a:latin typeface="+mn-lt"/>
+                  <a:ea typeface="+mn-ea"/>
+                  <a:cs typeface="+mn-cs"/>
+                </a:endParaRPr>
               </a:p>
             </p:txBody>
           </p:sp>
@@ -7360,7 +7995,7 @@
               <a:p>
                 <a:pPr algn="l"/>
                 <a:r>
-                  <a:rPr lang="en" sz="1500" dirty="0">
+                  <a:rPr lang="en-GB" sz="1500" dirty="0">
                     <a:solidFill>
                       <a:schemeClr val="accent5"/>
                     </a:solidFill>
@@ -7370,6 +8005,14 @@
                   </a:rPr>
                   <a:t>Increase storage power</a:t>
                 </a:r>
+                <a:endParaRPr lang="en-GB" sz="1500" dirty="0">
+                  <a:solidFill>
+                    <a:schemeClr val="accent5"/>
+                  </a:solidFill>
+                  <a:latin typeface="+mn-lt"/>
+                  <a:ea typeface="+mn-ea"/>
+                  <a:cs typeface="+mn-cs"/>
+                </a:endParaRPr>
               </a:p>
             </p:txBody>
           </p:sp>
@@ -7404,7 +8047,7 @@
                   </a:lnSpc>
                 </a:pPr>
                 <a:r>
-                  <a:rPr lang="en" sz="1500" dirty="0">
+                  <a:rPr lang="en-GB" sz="1500" dirty="0">
                     <a:solidFill>
                       <a:schemeClr val="accent5"/>
                     </a:solidFill>
@@ -7415,7 +8058,7 @@
                   <a:t>Greedy allocation</a:t>
                 </a:r>
                 <a:br>
-                  <a:rPr lang="en" sz="1500" dirty="0">
+                  <a:rPr lang="en-GB" sz="1500" dirty="0">
                     <a:solidFill>
                       <a:schemeClr val="accent5"/>
                     </a:solidFill>
@@ -7425,7 +8068,7 @@
                   </a:rPr>
                 </a:br>
                 <a:r>
-                  <a:rPr lang="en" sz="1500" dirty="0">
+                  <a:rPr lang="en-GB" sz="1500" dirty="0">
                     <a:solidFill>
                       <a:schemeClr val="accent5"/>
                     </a:solidFill>
@@ -7435,6 +8078,14 @@
                   </a:rPr>
                   <a:t>when enabled</a:t>
                 </a:r>
+                <a:endParaRPr lang="en-GB" sz="1500" dirty="0">
+                  <a:solidFill>
+                    <a:schemeClr val="accent5"/>
+                  </a:solidFill>
+                  <a:latin typeface="+mn-lt"/>
+                  <a:ea typeface="+mn-ea"/>
+                  <a:cs typeface="+mn-cs"/>
+                </a:endParaRPr>
               </a:p>
             </p:txBody>
           </p:sp>
@@ -7463,22 +8114,27 @@
                 </a:ln>
               </p:spPr>
               <p:txBody>
-                <a:bodyPr lIns="0" tIns="0" rIns="0" bIns="0" wrap="none" anchor="ctr">
+                <a:bodyPr wrap="none" lIns="0" tIns="0" rIns="0" bIns="0" anchor="ctr">
                   <a:normAutofit/>
                 </a:bodyPr>
                 <a:lstStyle/>
                 <a:p>
                   <a:pPr algn="l"/>
                   <a14:m>
-                    <m:oMathPara xmlns:a="http://schemas.openxmlformats.org/drawingml/2006/main" xmlns:m="http://schemas.openxmlformats.org/officeDocument/2006/math">
+                    <m:oMathPara xmlns:m="http://schemas.openxmlformats.org/officeDocument/2006/math">
                       <m:oMathParaPr>
-                        <m:jc m:val="left"/>
+                        <m:jc m:val="center"/>
                       </m:oMathParaPr>
-                      <m:oMath>
+                      <m:oMath xmlns:m="http://schemas.openxmlformats.org/officeDocument/2006/math">
                         <m:sSub>
+                          <m:sSubPr>
+                            <m:ctrlPr>
+                              <a:rPr/>
+                            </m:ctrlPr>
+                          </m:sSubPr>
                           <m:e>
                             <m:r>
-                              <a:rPr lang="en" sz="2100" dirty="0">
+                              <a:rPr lang="en-GB" sz="2100" dirty="0">
                                 <a:solidFill>
                                   <a:srgbClr val="102B46"/>
                                 </a:solidFill>
@@ -7486,12 +8142,12 @@
                                 <a:ea typeface="Cambria Math"/>
                                 <a:cs typeface="Cambria Math"/>
                               </a:rPr>
-                              <m:t>P</m:t>
+                              <m:t>𝑃</m:t>
                             </m:r>
                           </m:e>
                           <m:sub>
                             <m:r>
-                              <a:rPr lang="en" sz="2100" dirty="0">
+                              <a:rPr lang="en-GB" sz="2100" dirty="0">
                                 <a:solidFill>
                                   <a:srgbClr val="102B46"/>
                                 </a:solidFill>
@@ -7499,15 +8155,12 @@
                                 <a:ea typeface="Cambria Math"/>
                                 <a:cs typeface="Cambria Math"/>
                               </a:rPr>
-                              <m:t>j</m:t>
+                              <m:t>𝑗</m:t>
                             </m:r>
                           </m:sub>
                         </m:sSub>
                         <m:r>
-                          <m:rPr>
-                            <m:sty m:val="p"/>
-                          </m:rPr>
-                          <a:rPr lang="en" sz="2100" dirty="0">
+                          <a:rPr lang="en-GB" sz="2100" dirty="0">
                             <a:solidFill>
                               <a:srgbClr val="102B46"/>
                             </a:solidFill>
@@ -7518,13 +8171,17 @@
                           <m:t>←</m:t>
                         </m:r>
                         <m:func>
-                          <m:funcPr/>
+                          <m:funcPr>
+                            <m:ctrlPr>
+                              <a:rPr/>
+                            </m:ctrlPr>
+                          </m:funcPr>
                           <m:fName>
                             <m:r>
                               <m:rPr>
                                 <m:sty m:val="p"/>
                               </m:rPr>
-                              <a:rPr lang="en" sz="2100" dirty="0">
+                              <a:rPr lang="en-GB" sz="2100" dirty="0">
                                 <a:solidFill>
                                   <a:srgbClr val="102B46"/>
                                 </a:solidFill>
@@ -7538,12 +8195,9 @@
                           <m:e>
                             <m:d>
                               <m:dPr>
-                                <m:begChr m:val="("/>
                                 <m:sepChr m:val=""/>
-                                <m:endChr m:val=")"/>
-                                <m:grow m:val="on"/>
                                 <m:ctrlPr>
-                                  <a:rPr lang="en" sz="2100" dirty="0">
+                                  <a:rPr lang="en-GB" sz="2100" dirty="0">
                                     <a:solidFill>
                                       <a:srgbClr val="102B46"/>
                                     </a:solidFill>
@@ -7555,13 +8209,17 @@
                               </m:dPr>
                               <m:e>
                                 <m:func>
-                                  <m:funcPr/>
+                                  <m:funcPr>
+                                    <m:ctrlPr>
+                                      <a:rPr/>
+                                    </m:ctrlPr>
+                                  </m:funcPr>
                                   <m:fName>
                                     <m:r>
                                       <m:rPr>
                                         <m:sty m:val="p"/>
                                       </m:rPr>
-                                      <a:rPr lang="en" sz="2100" dirty="0">
+                                      <a:rPr lang="en-GB" sz="2100" dirty="0">
                                         <a:solidFill>
                                           <a:srgbClr val="102B46"/>
                                         </a:solidFill>
@@ -7578,9 +8236,8 @@
                                         <m:begChr m:val="{"/>
                                         <m:sepChr m:val=""/>
                                         <m:endChr m:val="}"/>
-                                        <m:grow m:val="on"/>
                                         <m:ctrlPr>
-                                          <a:rPr lang="en" sz="2100" dirty="0">
+                                          <a:rPr lang="en-GB" sz="2100" dirty="0">
                                             <a:solidFill>
                                               <a:srgbClr val="102B46"/>
                                             </a:solidFill>
@@ -7592,9 +8249,14 @@
                                       </m:dPr>
                                       <m:e>
                                         <m:sSub>
+                                          <m:sSubPr>
+                                            <m:ctrlPr>
+                                              <a:rPr/>
+                                            </m:ctrlPr>
+                                          </m:sSubPr>
                                           <m:e>
                                             <m:r>
-                                              <a:rPr lang="en" sz="2100" dirty="0">
+                                              <a:rPr lang="en-GB" sz="2100" dirty="0">
                                                 <a:solidFill>
                                                   <a:srgbClr val="102B46"/>
                                                 </a:solidFill>
@@ -7602,12 +8264,12 @@
                                                 <a:ea typeface="Cambria Math"/>
                                                 <a:cs typeface="Cambria Math"/>
                                               </a:rPr>
-                                              <m:t>P</m:t>
+                                              <m:t>𝑃</m:t>
                                             </m:r>
                                           </m:e>
                                           <m:sub>
                                             <m:r>
-                                              <a:rPr lang="en" sz="2100" dirty="0">
+                                              <a:rPr lang="en-GB" sz="2100" dirty="0">
                                                 <a:solidFill>
                                                   <a:srgbClr val="102B46"/>
                                                 </a:solidFill>
@@ -7615,15 +8277,12 @@
                                                 <a:ea typeface="Cambria Math"/>
                                                 <a:cs typeface="Cambria Math"/>
                                               </a:rPr>
-                                              <m:t>j</m:t>
+                                              <m:t>𝑗</m:t>
                                             </m:r>
                                           </m:sub>
                                         </m:sSub>
                                         <m:r>
-                                          <m:rPr>
-                                            <m:sty m:val="p"/>
-                                          </m:rPr>
-                                          <a:rPr lang="en" sz="2100" dirty="0">
+                                          <a:rPr lang="en-GB" sz="2100" dirty="0">
                                             <a:solidFill>
                                               <a:srgbClr val="102B46"/>
                                             </a:solidFill>
@@ -7634,15 +8293,19 @@
                                           <m:t>,</m:t>
                                         </m:r>
                                         <m:sSup>
+                                          <m:sSupPr>
+                                            <m:ctrlPr>
+                                              <a:rPr/>
+                                            </m:ctrlPr>
+                                          </m:sSupPr>
                                           <m:e>
                                             <m:d>
                                               <m:dPr>
                                                 <m:begChr m:val="["/>
                                                 <m:sepChr m:val=""/>
                                                 <m:endChr m:val="]"/>
-                                                <m:grow m:val="on"/>
                                                 <m:ctrlPr>
-                                                  <a:rPr lang="en" sz="2100" dirty="0">
+                                                  <a:rPr lang="en-GB" sz="2100" dirty="0">
                                                     <a:solidFill>
                                                       <a:srgbClr val="102B46"/>
                                                     </a:solidFill>
@@ -7654,9 +8317,14 @@
                                               </m:dPr>
                                               <m:e>
                                                 <m:sSubSup>
+                                                  <m:sSubSupPr>
+                                                    <m:ctrlPr>
+                                                      <a:rPr/>
+                                                    </m:ctrlPr>
+                                                  </m:sSubSupPr>
                                                   <m:e>
                                                     <m:r>
-                                                      <a:rPr lang="en" sz="2100" dirty="0">
+                                                      <a:rPr lang="en-GB" sz="2100" dirty="0">
                                                         <a:solidFill>
                                                           <a:srgbClr val="102B46"/>
                                                         </a:solidFill>
@@ -7664,12 +8332,12 @@
                                                         <a:ea typeface="Cambria Math"/>
                                                         <a:cs typeface="Cambria Math"/>
                                                       </a:rPr>
-                                                      <m:t>r</m:t>
+                                                      <m:t>𝑟</m:t>
                                                     </m:r>
                                                   </m:e>
                                                   <m:sub>
                                                     <m:r>
-                                                      <a:rPr lang="en" sz="2100" dirty="0">
+                                                      <a:rPr lang="en-GB" sz="2100" dirty="0">
                                                         <a:solidFill>
                                                           <a:srgbClr val="102B46"/>
                                                         </a:solidFill>
@@ -7677,12 +8345,12 @@
                                                         <a:ea typeface="Cambria Math"/>
                                                         <a:cs typeface="Cambria Math"/>
                                                       </a:rPr>
-                                                      <m:t>j</m:t>
+                                                      <m:t>𝑗</m:t>
                                                     </m:r>
                                                   </m:sub>
                                                   <m:sup>
                                                     <m:r>
-                                                      <a:rPr lang="en" sz="2100" dirty="0">
+                                                      <a:rPr lang="en-GB" sz="2100" dirty="0">
                                                         <a:solidFill>
                                                           <a:srgbClr val="102B46"/>
                                                         </a:solidFill>
@@ -7695,10 +8363,7 @@
                                                   </m:sup>
                                                 </m:sSubSup>
                                                 <m:r>
-                                                  <m:rPr>
-                                                    <m:sty m:val="p"/>
-                                                  </m:rPr>
-                                                  <a:rPr lang="en" sz="2100" dirty="0">
+                                                  <a:rPr lang="en-GB" sz="2100" dirty="0">
                                                     <a:solidFill>
                                                       <a:srgbClr val="102B46"/>
                                                     </a:solidFill>
@@ -7709,7 +8374,7 @@
                                                   <m:t>−</m:t>
                                                 </m:r>
                                                 <m:r>
-                                                  <a:rPr lang="en" sz="2100" dirty="0">
+                                                  <a:rPr lang="en-GB" sz="2100" dirty="0">
                                                     <a:solidFill>
                                                       <a:srgbClr val="102B46"/>
                                                     </a:solidFill>
@@ -7717,12 +8382,17 @@
                                                     <a:ea typeface="Cambria Math"/>
                                                     <a:cs typeface="Cambria Math"/>
                                                   </a:rPr>
-                                                  <m:t>β</m:t>
+                                                  <m:t>𝛽</m:t>
                                                 </m:r>
                                                 <m:sSub>
+                                                  <m:sSubPr>
+                                                    <m:ctrlPr>
+                                                      <a:rPr/>
+                                                    </m:ctrlPr>
+                                                  </m:sSubPr>
                                                   <m:e>
                                                     <m:r>
-                                                      <a:rPr lang="en" sz="2100" dirty="0">
+                                                      <a:rPr lang="en-GB" sz="2100" dirty="0">
                                                         <a:solidFill>
                                                           <a:srgbClr val="102B46"/>
                                                         </a:solidFill>
@@ -7730,12 +8400,12 @@
                                                         <a:ea typeface="Cambria Math"/>
                                                         <a:cs typeface="Cambria Math"/>
                                                       </a:rPr>
-                                                      <m:t>R</m:t>
+                                                      <m:t>𝑅</m:t>
                                                     </m:r>
                                                   </m:e>
                                                   <m:sub>
                                                     <m:r>
-                                                      <a:rPr lang="en" sz="2100" dirty="0">
+                                                      <a:rPr lang="en-GB" sz="2100" dirty="0">
                                                         <a:solidFill>
                                                           <a:srgbClr val="102B46"/>
                                                         </a:solidFill>
@@ -7743,14 +8413,19 @@
                                                         <a:ea typeface="Cambria Math"/>
                                                         <a:cs typeface="Cambria Math"/>
                                                       </a:rPr>
-                                                      <m:t>j</m:t>
+                                                      <m:t>𝑗</m:t>
                                                     </m:r>
                                                   </m:sub>
                                                 </m:sSub>
                                                 <m:sSubSup>
+                                                  <m:sSubSupPr>
+                                                    <m:ctrlPr>
+                                                      <a:rPr/>
+                                                    </m:ctrlPr>
+                                                  </m:sSubSupPr>
                                                   <m:e>
                                                     <m:r>
-                                                      <a:rPr lang="en" sz="2100" dirty="0">
+                                                      <a:rPr lang="en-GB" sz="2100" dirty="0">
                                                         <a:solidFill>
                                                           <a:srgbClr val="102B46"/>
                                                         </a:solidFill>
@@ -7758,12 +8433,12 @@
                                                         <a:ea typeface="Cambria Math"/>
                                                         <a:cs typeface="Cambria Math"/>
                                                       </a:rPr>
-                                                      <m:t>L</m:t>
+                                                      <m:t>𝐿</m:t>
                                                     </m:r>
                                                   </m:e>
                                                   <m:sub>
                                                     <m:r>
-                                                      <a:rPr lang="en" sz="2100" dirty="0">
+                                                      <a:rPr lang="en-GB" sz="2100" dirty="0">
                                                         <a:solidFill>
                                                           <a:srgbClr val="102B46"/>
                                                         </a:solidFill>
@@ -7771,12 +8446,12 @@
                                                         <a:ea typeface="Cambria Math"/>
                                                         <a:cs typeface="Cambria Math"/>
                                                       </a:rPr>
-                                                      <m:t>j</m:t>
+                                                      <m:t>𝑗</m:t>
                                                     </m:r>
                                                   </m:sub>
                                                   <m:sup>
                                                     <m:r>
-                                                      <a:rPr lang="en" sz="2100" dirty="0">
+                                                      <a:rPr lang="en-GB" sz="2100" dirty="0">
                                                         <a:solidFill>
                                                           <a:srgbClr val="102B46"/>
                                                         </a:solidFill>
@@ -7784,7 +8459,7 @@
                                                         <a:ea typeface="Cambria Math"/>
                                                         <a:cs typeface="Cambria Math"/>
                                                       </a:rPr>
-                                                      <m:t>p</m:t>
+                                                      <m:t>𝑝</m:t>
                                                     </m:r>
                                                   </m:sup>
                                                 </m:sSubSup>
@@ -7793,10 +8468,7 @@
                                           </m:e>
                                           <m:sup>
                                             <m:r>
-                                              <m:rPr>
-                                                <m:sty m:val="p"/>
-                                              </m:rPr>
-                                              <a:rPr lang="en" sz="2100" dirty="0">
+                                              <a:rPr lang="en-GB" sz="2100" dirty="0">
                                                 <a:solidFill>
                                                   <a:srgbClr val="102B46"/>
                                                 </a:solidFill>
@@ -7813,10 +8485,7 @@
                                   </m:e>
                                 </m:func>
                                 <m:r>
-                                  <m:rPr>
-                                    <m:sty m:val="p"/>
-                                  </m:rPr>
-                                  <a:rPr lang="en" sz="2100" dirty="0">
+                                  <a:rPr lang="en-GB" sz="2100" dirty="0">
                                     <a:solidFill>
                                       <a:srgbClr val="102B46"/>
                                     </a:solidFill>
@@ -7827,7 +8496,7 @@
                                   <m:t>,</m:t>
                                 </m:r>
                                 <m:r>
-                                  <a:rPr lang="en" sz="2100" dirty="0">
+                                  <a:rPr lang="en-GB" sz="2100" dirty="0">
                                     <a:solidFill>
                                       <a:srgbClr val="102B46"/>
                                     </a:solidFill>
@@ -7838,10 +8507,7 @@
                                   <m:t>0</m:t>
                                 </m:r>
                                 <m:r>
-                                  <m:rPr>
-                                    <m:sty m:val="p"/>
-                                  </m:rPr>
-                                  <a:rPr lang="en" sz="2100" dirty="0">
+                                  <a:rPr lang="en-GB" sz="2100" dirty="0">
                                     <a:solidFill>
                                       <a:srgbClr val="102B46"/>
                                     </a:solidFill>
@@ -7852,9 +8518,14 @@
                                   <m:t>,</m:t>
                                 </m:r>
                                 <m:sSub>
+                                  <m:sSubPr>
+                                    <m:ctrlPr>
+                                      <a:rPr/>
+                                    </m:ctrlPr>
+                                  </m:sSubPr>
                                   <m:e>
                                     <m:r>
-                                      <a:rPr lang="en" sz="2100" dirty="0">
+                                      <a:rPr lang="en-GB" sz="2100" dirty="0">
                                         <a:solidFill>
                                           <a:srgbClr val="102B46"/>
                                         </a:solidFill>
@@ -7862,30 +8533,24 @@
                                         <a:ea typeface="Cambria Math"/>
                                         <a:cs typeface="Cambria Math"/>
                                       </a:rPr>
-                                      <m:t>P</m:t>
+                                      <m:t>𝑃</m:t>
                                     </m:r>
                                   </m:e>
                                   <m:sub>
-                                    <m:func>
-                                      <m:funcPr/>
-                                      <m:fName>
-                                        <m:r>
-                                          <m:rPr>
-                                            <m:sty m:val="p"/>
-                                          </m:rPr>
-                                          <a:rPr lang="en" sz="2100" dirty="0">
-                                            <a:solidFill>
-                                              <a:srgbClr val="102B46"/>
-                                            </a:solidFill>
-                                            <a:latin typeface="Cambria Math"/>
-                                            <a:ea typeface="Cambria Math"/>
-                                            <a:cs typeface="Cambria Math"/>
-                                          </a:rPr>
-                                          <m:t>max</m:t>
-                                        </m:r>
-                                      </m:fName>
-                                      <m:e/>
-                                    </m:func>
+                                    <m:r>
+                                      <m:rPr>
+                                        <m:sty m:val="p"/>
+                                      </m:rPr>
+                                      <a:rPr lang="en-US" altLang="en-GB" sz="2100" dirty="0">
+                                        <a:solidFill>
+                                          <a:srgbClr val="102B46"/>
+                                        </a:solidFill>
+                                        <a:latin typeface="Cambria Math"/>
+                                        <a:ea typeface="Cambria Math"/>
+                                        <a:cs typeface="Cambria Math"/>
+                                      </a:rPr>
+                                      <m:t>max</m:t>
+                                    </m:r>
                                   </m:sub>
                                 </m:sSub>
                               </m:e>
@@ -7899,6 +8564,44 @@
               </p:txBody>
             </p:sp>
           </mc:Choice>
+          <mc:Fallback>
+            <p:sp>
+              <p:nvSpPr>
+                <p:cNvPr id="40" name="station-repair-equation"/>
+                <p:cNvSpPr txBox="1">
+                  <a:spLocks noRot="1" noChangeAspect="1" noMove="1" noResize="1" noEditPoints="1" noAdjustHandles="1" noChangeArrowheads="1" noChangeShapeType="1" noTextEdit="1"/>
+                </p:cNvSpPr>
+                <p:nvPr/>
+              </p:nvSpPr>
+              <p:spPr>
+                <a:xfrm>
+                  <a:off x="571500" y="5467350"/>
+                  <a:ext cx="8096250" cy="590550"/>
+                </a:xfrm>
+                <a:prstGeom prst="rect">
+                  <a:avLst/>
+                </a:prstGeom>
+                <a:blipFill rotWithShape="1">
+                  <a:blip r:embed="rId1"/>
+                </a:blipFill>
+                <a:ln>
+                  <a:noFill/>
+                </a:ln>
+              </p:spPr>
+              <p:txBody>
+                <a:bodyPr/>
+                <a:lstStyle/>
+                <a:p>
+                  <a:r>
+                    <a:rPr lang="zh-CN" altLang="en-US">
+                      <a:noFill/>
+                    </a:rPr>
+                    <a:t> </a:t>
+                  </a:r>
+                </a:p>
+              </p:txBody>
+            </p:sp>
+          </mc:Fallback>
         </mc:AlternateContent>
         <p:sp>
           <p:nvSpPr>
@@ -7937,6 +8640,14 @@
                 </a:rPr>
                 <a:t>β = 0.85</a:t>
               </a:r>
+              <a:endParaRPr lang="el-GR" sz="1350" dirty="0">
+                <a:solidFill>
+                  <a:schemeClr val="accent5"/>
+                </a:solidFill>
+                <a:latin typeface="+mn-lt"/>
+                <a:ea typeface="+mn-ea"/>
+                <a:cs typeface="+mn-cs"/>
+              </a:endParaRPr>
             </a:p>
           </p:txBody>
         </p:sp>
@@ -7982,7 +8693,7 @@
             <a:p>
               <a:pPr algn="l"/>
               <a:r>
-                <a:rPr lang="en" sz="1350" dirty="0">
+                <a:rPr lang="en-GB" sz="1350" dirty="0">
                   <a:solidFill>
                     <a:schemeClr val="accent5"/>
                   </a:solidFill>
@@ -7992,6 +8703,14 @@
                 </a:rPr>
                 <a:t>Residual violations: constraint domination. Standard variation and environmental selection are retained.</a:t>
               </a:r>
+              <a:endParaRPr lang="en-GB" sz="1350" dirty="0">
+                <a:solidFill>
+                  <a:schemeClr val="accent5"/>
+                </a:solidFill>
+                <a:latin typeface="+mn-lt"/>
+                <a:ea typeface="+mn-ea"/>
+                <a:cs typeface="+mn-cs"/>
+              </a:endParaRPr>
             </a:p>
           </p:txBody>
         </p:sp>
@@ -8037,7 +8756,7 @@
             <a:p>
               <a:pPr algn="l"/>
               <a:r>
-                <a:rPr lang="en" sz="1050" dirty="0">
+                <a:rPr lang="en-GB" sz="1050" dirty="0">
                   <a:solidFill>
                     <a:schemeClr val="accent5"/>
                   </a:solidFill>
@@ -8047,6 +8766,14 @@
                 </a:rPr>
                 <a:t>Source: Section II-B, Algorithm 1. r0: pre-storage reverse injection; Lp: forecast peak load; Pmax: storage rating bound.</a:t>
               </a:r>
+              <a:endParaRPr lang="en-GB" sz="1050" dirty="0">
+                <a:solidFill>
+                  <a:schemeClr val="accent5"/>
+                </a:solidFill>
+                <a:latin typeface="+mn-lt"/>
+                <a:ea typeface="+mn-ea"/>
+                <a:cs typeface="+mn-cs"/>
+              </a:endParaRPr>
             </a:p>
           </p:txBody>
         </p:sp>
@@ -8077,7 +8804,7 @@
             <a:p>
               <a:pPr algn="r"/>
               <a:r>
-                <a:rPr lang="en" sz="1050" dirty="0">
+                <a:rPr lang="en-GB" sz="1050" dirty="0">
                   <a:solidFill>
                     <a:schemeClr val="accent5"/>
                   </a:solidFill>
@@ -8087,6 +8814,14 @@
                 </a:rPr>
                 <a:t>03 / 05</a:t>
               </a:r>
+              <a:endParaRPr lang="en-GB" sz="1050" dirty="0">
+                <a:solidFill>
+                  <a:schemeClr val="accent5"/>
+                </a:solidFill>
+                <a:latin typeface="+mn-lt"/>
+                <a:ea typeface="+mn-ea"/>
+                <a:cs typeface="+mn-cs"/>
+              </a:endParaRPr>
             </a:p>
           </p:txBody>
         </p:sp>
@@ -8096,9 +8831,18 @@
   <p:clrMapOvr>
     <a:masterClrMapping/>
   </p:clrMapOvr>
-  <p:transition xmlns:p14="http://schemas.microsoft.com/office/powerpoint/2010/main" p14:dur="400">
-    <p:fade/>
-  </p:transition>
+  <mc:AlternateContent xmlns:mc="http://schemas.openxmlformats.org/markup-compatibility/2006">
+    <mc:Choice xmlns:p14="http://schemas.microsoft.com/office/powerpoint/2010/main" Requires="p14">
+      <p:transition p14:dur="400">
+        <p:fade/>
+      </p:transition>
+    </mc:Choice>
+    <mc:Fallback>
+      <p:transition>
+        <p:fade/>
+      </p:transition>
+    </mc:Fallback>
+  </mc:AlternateContent>
 </p:sld>
 </file>
 
@@ -8168,7 +8912,7 @@
             <a:p>
               <a:pPr algn="l"/>
               <a:r>
-                <a:rPr lang="en" sz="1350" b="1" dirty="0">
+                <a:rPr lang="en-GB" sz="1350" b="1" dirty="0">
                   <a:solidFill>
                     <a:schemeClr val="accent2"/>
                   </a:solidFill>
@@ -8178,6 +8922,14 @@
                 </a:rPr>
                 <a:t>03 / EXPERIMENTAL EVIDENCE</a:t>
               </a:r>
+              <a:endParaRPr lang="en-GB" sz="1350" b="1" dirty="0">
+                <a:solidFill>
+                  <a:schemeClr val="accent2"/>
+                </a:solidFill>
+                <a:latin typeface="+mn-lt"/>
+                <a:ea typeface="+mn-ea"/>
+                <a:cs typeface="+mn-cs"/>
+              </a:endParaRPr>
             </a:p>
           </p:txBody>
         </p:sp>
@@ -8208,7 +8960,7 @@
             <a:p>
               <a:pPr algn="l"/>
               <a:r>
-                <a:rPr lang="en" sz="3150" b="1" dirty="0">
+                <a:rPr lang="en-GB" sz="3150" b="1" dirty="0">
                   <a:solidFill>
                     <a:schemeClr val="accent1"/>
                   </a:solidFill>
@@ -8218,6 +8970,14 @@
                 </a:rPr>
                 <a:t>Better search, lower modeled planning cost</a:t>
               </a:r>
+              <a:endParaRPr lang="en-GB" sz="3150" b="1" dirty="0">
+                <a:solidFill>
+                  <a:schemeClr val="accent1"/>
+                </a:solidFill>
+                <a:latin typeface="+mn-lt"/>
+                <a:ea typeface="+mn-ea"/>
+                <a:cs typeface="+mn-cs"/>
+              </a:endParaRPr>
             </a:p>
           </p:txBody>
         </p:sp>
@@ -8263,7 +9023,7 @@
             <a:p>
               <a:pPr algn="l"/>
               <a:r>
-                <a:rPr lang="en" sz="1500" dirty="0">
+                <a:rPr lang="en-GB" sz="1500" dirty="0">
                   <a:solidFill>
                     <a:schemeClr val="accent5"/>
                   </a:solidFill>
@@ -8273,6 +9033,14 @@
                 </a:rPr>
                 <a:t>Mean final HV | K = 40</a:t>
               </a:r>
+              <a:endParaRPr lang="en-GB" sz="1500" dirty="0">
+                <a:solidFill>
+                  <a:schemeClr val="accent5"/>
+                </a:solidFill>
+                <a:latin typeface="+mn-lt"/>
+                <a:ea typeface="+mn-ea"/>
+                <a:cs typeface="+mn-cs"/>
+              </a:endParaRPr>
             </a:p>
           </p:txBody>
         </p:sp>
@@ -8303,7 +9071,7 @@
             <a:p>
               <a:pPr algn="l"/>
               <a:r>
-                <a:rPr lang="en" sz="4050" b="1" dirty="0">
+                <a:rPr lang="en-GB" sz="4050" b="1" dirty="0">
                   <a:solidFill>
                     <a:schemeClr val="accent2"/>
                   </a:solidFill>
@@ -8313,6 +9081,14 @@
                 </a:rPr>
                 <a:t>+4.8%</a:t>
               </a:r>
+              <a:endParaRPr lang="en-GB" sz="4050" b="1" dirty="0">
+                <a:solidFill>
+                  <a:schemeClr val="accent2"/>
+                </a:solidFill>
+                <a:latin typeface="+mn-lt"/>
+                <a:ea typeface="+mn-ea"/>
+                <a:cs typeface="+mn-cs"/>
+              </a:endParaRPr>
             </a:p>
           </p:txBody>
         </p:sp>
@@ -8343,7 +9119,7 @@
             <a:p>
               <a:pPr algn="l"/>
               <a:r>
-                <a:rPr lang="en" sz="1350" dirty="0">
+                <a:rPr lang="en-GB" sz="1350" dirty="0">
                   <a:solidFill>
                     <a:schemeClr val="accent5"/>
                   </a:solidFill>
@@ -8353,6 +9129,14 @@
                 </a:rPr>
                 <a:t>EPG: 400 gen · NSGA-II: 800 gen</a:t>
               </a:r>
+              <a:endParaRPr lang="en-GB" sz="1350" dirty="0">
+                <a:solidFill>
+                  <a:schemeClr val="accent5"/>
+                </a:solidFill>
+                <a:latin typeface="+mn-lt"/>
+                <a:ea typeface="+mn-ea"/>
+                <a:cs typeface="+mn-cs"/>
+              </a:endParaRPr>
             </a:p>
           </p:txBody>
         </p:sp>
@@ -8398,7 +9182,7 @@
             <a:p>
               <a:pPr algn="l"/>
               <a:r>
-                <a:rPr lang="en" sz="1500" dirty="0">
+                <a:rPr lang="en-GB" sz="1500" dirty="0">
                   <a:solidFill>
                     <a:schemeClr val="accent5"/>
                   </a:solidFill>
@@ -8408,6 +9192,14 @@
                 </a:rPr>
                 <a:t>Annualized cost | K = 20</a:t>
               </a:r>
+              <a:endParaRPr lang="en-GB" sz="1500" dirty="0">
+                <a:solidFill>
+                  <a:schemeClr val="accent5"/>
+                </a:solidFill>
+                <a:latin typeface="+mn-lt"/>
+                <a:ea typeface="+mn-ea"/>
+                <a:cs typeface="+mn-cs"/>
+              </a:endParaRPr>
             </a:p>
           </p:txBody>
         </p:sp>
@@ -8438,7 +9230,7 @@
             <a:p>
               <a:pPr algn="l"/>
               <a:r>
-                <a:rPr lang="en" sz="4050" b="1" dirty="0">
+                <a:rPr lang="en-GB" sz="4050" b="1" dirty="0">
                   <a:solidFill>
                     <a:schemeClr val="accent2"/>
                   </a:solidFill>
@@ -8448,6 +9240,14 @@
                 </a:rPr>
                 <a:t>−3.4%</a:t>
               </a:r>
+              <a:endParaRPr lang="en-GB" sz="4050" b="1" dirty="0">
+                <a:solidFill>
+                  <a:schemeClr val="accent2"/>
+                </a:solidFill>
+                <a:latin typeface="+mn-lt"/>
+                <a:ea typeface="+mn-ea"/>
+                <a:cs typeface="+mn-cs"/>
+              </a:endParaRPr>
             </a:p>
           </p:txBody>
         </p:sp>
@@ -8478,7 +9278,7 @@
             <a:p>
               <a:pPr algn="l"/>
               <a:r>
-                <a:rPr lang="en" sz="1350" dirty="0">
+                <a:rPr lang="en-GB" sz="1350" dirty="0">
                   <a:solidFill>
                     <a:schemeClr val="accent5"/>
                   </a:solidFill>
@@ -8488,6 +9288,14 @@
                 </a:rPr>
                 <a:t>236.40 → 228.43 million CNY/yr</a:t>
               </a:r>
+              <a:endParaRPr lang="en-GB" sz="1350" dirty="0">
+                <a:solidFill>
+                  <a:schemeClr val="accent5"/>
+                </a:solidFill>
+                <a:latin typeface="+mn-lt"/>
+                <a:ea typeface="+mn-ea"/>
+                <a:cs typeface="+mn-cs"/>
+              </a:endParaRPr>
             </a:p>
           </p:txBody>
         </p:sp>
@@ -8533,7 +9341,7 @@
             <a:p>
               <a:pPr algn="l"/>
               <a:r>
-                <a:rPr lang="en" sz="1500" dirty="0">
+                <a:rPr lang="en-GB" sz="1500" dirty="0">
                   <a:solidFill>
                     <a:schemeClr val="accent5"/>
                   </a:solidFill>
@@ -8543,6 +9351,14 @@
                 </a:rPr>
                 <a:t>Modeled EENS | K = 20</a:t>
               </a:r>
+              <a:endParaRPr lang="en-GB" sz="1500" dirty="0">
+                <a:solidFill>
+                  <a:schemeClr val="accent5"/>
+                </a:solidFill>
+                <a:latin typeface="+mn-lt"/>
+                <a:ea typeface="+mn-ea"/>
+                <a:cs typeface="+mn-cs"/>
+              </a:endParaRPr>
             </a:p>
           </p:txBody>
         </p:sp>
@@ -8573,7 +9389,7 @@
             <a:p>
               <a:pPr algn="l"/>
               <a:r>
-                <a:rPr lang="en" sz="4050" b="1" dirty="0">
+                <a:rPr lang="en-GB" sz="4050" b="1" dirty="0">
                   <a:solidFill>
                     <a:schemeClr val="accent2"/>
                   </a:solidFill>
@@ -8583,6 +9399,14 @@
                 </a:rPr>
                 <a:t>0.00</a:t>
               </a:r>
+              <a:endParaRPr lang="en-GB" sz="4050" b="1" dirty="0">
+                <a:solidFill>
+                  <a:schemeClr val="accent2"/>
+                </a:solidFill>
+                <a:latin typeface="+mn-lt"/>
+                <a:ea typeface="+mn-ea"/>
+                <a:cs typeface="+mn-cs"/>
+              </a:endParaRPr>
             </a:p>
           </p:txBody>
         </p:sp>
@@ -8613,7 +9437,7 @@
             <a:p>
               <a:pPr algn="l"/>
               <a:r>
-                <a:rPr lang="en" sz="1350" dirty="0">
+                <a:rPr lang="en-GB" sz="1350" dirty="0">
                   <a:solidFill>
                     <a:schemeClr val="accent5"/>
                   </a:solidFill>
@@ -8623,6 +9447,14 @@
                 </a:rPr>
                 <a:t>561.00 → 0.00 MWh/yr</a:t>
               </a:r>
+              <a:endParaRPr lang="en-GB" sz="1350" dirty="0">
+                <a:solidFill>
+                  <a:schemeClr val="accent5"/>
+                </a:solidFill>
+                <a:latin typeface="+mn-lt"/>
+                <a:ea typeface="+mn-ea"/>
+                <a:cs typeface="+mn-cs"/>
+              </a:endParaRPr>
             </a:p>
           </p:txBody>
         </p:sp>
@@ -8704,7 +9536,7 @@
             <a:p>
               <a:pPr algn="l"/>
               <a:r>
-                <a:rPr lang="en" sz="1800" b="1" dirty="0">
+                <a:rPr lang="en-GB" sz="1800" b="1" dirty="0">
                   <a:solidFill>
                     <a:schemeClr val="accent1"/>
                   </a:solidFill>
@@ -8715,7 +9547,7 @@
                 <a:t>a</a:t>
               </a:r>
               <a:r>
-                <a:rPr lang="en" sz="1800" dirty="0">
+                <a:rPr lang="en-GB" sz="1800" dirty="0">
                   <a:solidFill>
                     <a:schemeClr val="accent1"/>
                   </a:solidFill>
@@ -8723,8 +9555,16 @@
                   <a:ea typeface="+mn-ea"/>
                   <a:cs typeface="+mn-cs"/>
                 </a:rPr>
-                <a:t xml:space="preserve"> Search dynamics | K = 40</a:t>
+                <a:t> Search dynamics | K = 40</a:t>
               </a:r>
+              <a:endParaRPr lang="en-GB" sz="1800" dirty="0">
+                <a:solidFill>
+                  <a:schemeClr val="accent1"/>
+                </a:solidFill>
+                <a:latin typeface="+mn-lt"/>
+                <a:ea typeface="+mn-ea"/>
+                <a:cs typeface="+mn-cs"/>
+              </a:endParaRPr>
             </a:p>
           </p:txBody>
         </p:sp>
@@ -8755,7 +9595,7 @@
             <a:p>
               <a:pPr algn="l"/>
               <a:r>
-                <a:rPr lang="en" sz="1800" b="1" dirty="0">
+                <a:rPr lang="en-GB" sz="1800" b="1" dirty="0">
                   <a:solidFill>
                     <a:schemeClr val="accent1"/>
                   </a:solidFill>
@@ -8766,7 +9606,7 @@
                 <a:t>b</a:t>
               </a:r>
               <a:r>
-                <a:rPr lang="en" sz="1800" dirty="0">
+                <a:rPr lang="en-GB" sz="1800" dirty="0">
                   <a:solidFill>
                     <a:schemeClr val="accent1"/>
                   </a:solidFill>
@@ -8774,8 +9614,16 @@
                   <a:ea typeface="+mn-ea"/>
                   <a:cs typeface="+mn-cs"/>
                 </a:rPr>
-                <a:t xml:space="preserve"> Ablation | K = 40</a:t>
+                <a:t> Ablation | K = 40</a:t>
               </a:r>
+              <a:endParaRPr lang="en-GB" sz="1800" dirty="0">
+                <a:solidFill>
+                  <a:schemeClr val="accent1"/>
+                </a:solidFill>
+                <a:latin typeface="+mn-lt"/>
+                <a:ea typeface="+mn-ea"/>
+                <a:cs typeface="+mn-cs"/>
+              </a:endParaRPr>
             </a:p>
           </p:txBody>
         </p:sp>
@@ -9940,7 +10788,7 @@
               <a:p>
                 <a:pPr algn="r"/>
                 <a:r>
-                  <a:rPr lang="en" sz="1350" dirty="0">
+                  <a:rPr lang="en-GB" sz="1350" dirty="0">
                     <a:solidFill>
                       <a:schemeClr val="accent5"/>
                     </a:solidFill>
@@ -9950,6 +10798,14 @@
                   </a:rPr>
                   <a:t>1.1</a:t>
                 </a:r>
+                <a:endParaRPr lang="en-GB" sz="1350" dirty="0">
+                  <a:solidFill>
+                    <a:schemeClr val="accent5"/>
+                  </a:solidFill>
+                  <a:latin typeface="+mn-lt"/>
+                  <a:ea typeface="+mn-ea"/>
+                  <a:cs typeface="+mn-cs"/>
+                </a:endParaRPr>
               </a:p>
             </p:txBody>
           </p:sp>
@@ -9980,7 +10836,7 @@
               <a:p>
                 <a:pPr algn="r"/>
                 <a:r>
-                  <a:rPr lang="en" sz="1350" dirty="0">
+                  <a:rPr lang="en-GB" sz="1350" dirty="0">
                     <a:solidFill>
                       <a:schemeClr val="accent5"/>
                     </a:solidFill>
@@ -9990,6 +10846,14 @@
                   </a:rPr>
                   <a:t>1.0</a:t>
                 </a:r>
+                <a:endParaRPr lang="en-GB" sz="1350" dirty="0">
+                  <a:solidFill>
+                    <a:schemeClr val="accent5"/>
+                  </a:solidFill>
+                  <a:latin typeface="+mn-lt"/>
+                  <a:ea typeface="+mn-ea"/>
+                  <a:cs typeface="+mn-cs"/>
+                </a:endParaRPr>
               </a:p>
             </p:txBody>
           </p:sp>
@@ -10020,7 +10884,7 @@
               <a:p>
                 <a:pPr algn="r"/>
                 <a:r>
-                  <a:rPr lang="en" sz="1350" dirty="0">
+                  <a:rPr lang="en-GB" sz="1350" dirty="0">
                     <a:solidFill>
                       <a:schemeClr val="accent5"/>
                     </a:solidFill>
@@ -10030,6 +10894,14 @@
                   </a:rPr>
                   <a:t>0.5</a:t>
                 </a:r>
+                <a:endParaRPr lang="en-GB" sz="1350" dirty="0">
+                  <a:solidFill>
+                    <a:schemeClr val="accent5"/>
+                  </a:solidFill>
+                  <a:latin typeface="+mn-lt"/>
+                  <a:ea typeface="+mn-ea"/>
+                  <a:cs typeface="+mn-cs"/>
+                </a:endParaRPr>
               </a:p>
             </p:txBody>
           </p:sp>
@@ -10060,7 +10932,7 @@
               <a:p>
                 <a:pPr algn="r"/>
                 <a:r>
-                  <a:rPr lang="en" sz="1350" dirty="0">
+                  <a:rPr lang="en-GB" sz="1350" dirty="0">
                     <a:solidFill>
                       <a:schemeClr val="accent5"/>
                     </a:solidFill>
@@ -10070,6 +10942,14 @@
                   </a:rPr>
                   <a:t>0.0</a:t>
                 </a:r>
+                <a:endParaRPr lang="en-GB" sz="1350" dirty="0">
+                  <a:solidFill>
+                    <a:schemeClr val="accent5"/>
+                  </a:solidFill>
+                  <a:latin typeface="+mn-lt"/>
+                  <a:ea typeface="+mn-ea"/>
+                  <a:cs typeface="+mn-cs"/>
+                </a:endParaRPr>
               </a:p>
             </p:txBody>
           </p:sp>
@@ -10115,7 +10995,7 @@
               <a:p>
                 <a:pPr algn="ctr"/>
                 <a:r>
-                  <a:rPr lang="en" sz="1350" dirty="0">
+                  <a:rPr lang="en-GB" sz="1350" dirty="0">
                     <a:solidFill>
                       <a:schemeClr val="accent5"/>
                     </a:solidFill>
@@ -10125,6 +11005,14 @@
                   </a:rPr>
                   <a:t>0</a:t>
                 </a:r>
+                <a:endParaRPr lang="en-GB" sz="1350" dirty="0">
+                  <a:solidFill>
+                    <a:schemeClr val="accent5"/>
+                  </a:solidFill>
+                  <a:latin typeface="+mn-lt"/>
+                  <a:ea typeface="+mn-ea"/>
+                  <a:cs typeface="+mn-cs"/>
+                </a:endParaRPr>
               </a:p>
             </p:txBody>
           </p:sp>
@@ -10155,7 +11043,7 @@
               <a:p>
                 <a:pPr algn="ctr"/>
                 <a:r>
-                  <a:rPr lang="en" sz="1350" dirty="0">
+                  <a:rPr lang="en-GB" sz="1350" dirty="0">
                     <a:solidFill>
                       <a:schemeClr val="accent5"/>
                     </a:solidFill>
@@ -10165,6 +11053,14 @@
                   </a:rPr>
                   <a:t>200</a:t>
                 </a:r>
+                <a:endParaRPr lang="en-GB" sz="1350" dirty="0">
+                  <a:solidFill>
+                    <a:schemeClr val="accent5"/>
+                  </a:solidFill>
+                  <a:latin typeface="+mn-lt"/>
+                  <a:ea typeface="+mn-ea"/>
+                  <a:cs typeface="+mn-cs"/>
+                </a:endParaRPr>
               </a:p>
             </p:txBody>
           </p:sp>
@@ -10195,7 +11091,7 @@
               <a:p>
                 <a:pPr algn="ctr"/>
                 <a:r>
-                  <a:rPr lang="en" sz="1350" dirty="0">
+                  <a:rPr lang="en-GB" sz="1350" dirty="0">
                     <a:solidFill>
                       <a:schemeClr val="accent5"/>
                     </a:solidFill>
@@ -10205,6 +11101,14 @@
                   </a:rPr>
                   <a:t>400</a:t>
                 </a:r>
+                <a:endParaRPr lang="en-GB" sz="1350" dirty="0">
+                  <a:solidFill>
+                    <a:schemeClr val="accent5"/>
+                  </a:solidFill>
+                  <a:latin typeface="+mn-lt"/>
+                  <a:ea typeface="+mn-ea"/>
+                  <a:cs typeface="+mn-cs"/>
+                </a:endParaRPr>
               </a:p>
             </p:txBody>
           </p:sp>
@@ -10235,7 +11139,7 @@
               <a:p>
                 <a:pPr algn="ctr"/>
                 <a:r>
-                  <a:rPr lang="en" sz="1350" dirty="0">
+                  <a:rPr lang="en-GB" sz="1350" dirty="0">
                     <a:solidFill>
                       <a:schemeClr val="accent5"/>
                     </a:solidFill>
@@ -10245,6 +11149,14 @@
                   </a:rPr>
                   <a:t>600</a:t>
                 </a:r>
+                <a:endParaRPr lang="en-GB" sz="1350" dirty="0">
+                  <a:solidFill>
+                    <a:schemeClr val="accent5"/>
+                  </a:solidFill>
+                  <a:latin typeface="+mn-lt"/>
+                  <a:ea typeface="+mn-ea"/>
+                  <a:cs typeface="+mn-cs"/>
+                </a:endParaRPr>
               </a:p>
             </p:txBody>
           </p:sp>
@@ -10275,7 +11187,7 @@
               <a:p>
                 <a:pPr algn="ctr"/>
                 <a:r>
-                  <a:rPr lang="en" sz="1350" dirty="0">
+                  <a:rPr lang="en-GB" sz="1350" dirty="0">
                     <a:solidFill>
                       <a:schemeClr val="accent5"/>
                     </a:solidFill>
@@ -10285,6 +11197,14 @@
                   </a:rPr>
                   <a:t>800</a:t>
                 </a:r>
+                <a:endParaRPr lang="en-GB" sz="1350" dirty="0">
+                  <a:solidFill>
+                    <a:schemeClr val="accent5"/>
+                  </a:solidFill>
+                  <a:latin typeface="+mn-lt"/>
+                  <a:ea typeface="+mn-ea"/>
+                  <a:cs typeface="+mn-cs"/>
+                </a:endParaRPr>
               </a:p>
             </p:txBody>
           </p:sp>
@@ -10316,7 +11236,7 @@
             <a:p>
               <a:pPr algn="ctr"/>
               <a:r>
-                <a:rPr lang="en" sz="1350" dirty="0">
+                <a:rPr lang="en-GB" sz="1350" dirty="0">
                   <a:solidFill>
                     <a:schemeClr val="accent5"/>
                   </a:solidFill>
@@ -10326,6 +11246,14 @@
                 </a:rPr>
                 <a:t>Generation</a:t>
               </a:r>
+              <a:endParaRPr lang="en-GB" sz="1350" dirty="0">
+                <a:solidFill>
+                  <a:schemeClr val="accent5"/>
+                </a:solidFill>
+                <a:latin typeface="+mn-lt"/>
+                <a:ea typeface="+mn-ea"/>
+                <a:cs typeface="+mn-cs"/>
+              </a:endParaRPr>
             </a:p>
           </p:txBody>
         </p:sp>
@@ -10356,7 +11284,7 @@
             <a:p>
               <a:pPr algn="l"/>
               <a:r>
-                <a:rPr lang="en" sz="1350" dirty="0">
+                <a:rPr lang="en-GB" sz="1350" dirty="0">
                   <a:solidFill>
                     <a:schemeClr val="accent5"/>
                   </a:solidFill>
@@ -10366,6 +11294,14 @@
                 </a:rPr>
                 <a:t>Normalized HV</a:t>
               </a:r>
+              <a:endParaRPr lang="en-GB" sz="1350" dirty="0">
+                <a:solidFill>
+                  <a:schemeClr val="accent5"/>
+                </a:solidFill>
+                <a:latin typeface="+mn-lt"/>
+                <a:ea typeface="+mn-ea"/>
+                <a:cs typeface="+mn-cs"/>
+              </a:endParaRPr>
             </a:p>
           </p:txBody>
         </p:sp>
@@ -10396,7 +11332,7 @@
             <a:p>
               <a:pPr algn="l"/>
               <a:r>
-                <a:rPr lang="en" sz="1650" b="1" dirty="0">
+                <a:rPr lang="en-GB" sz="1650" b="1" dirty="0">
                   <a:solidFill>
                     <a:schemeClr val="accent2"/>
                   </a:solidFill>
@@ -10406,6 +11342,14 @@
                 </a:rPr>
                 <a:t>84</a:t>
               </a:r>
+              <a:endParaRPr lang="en-GB" sz="1650" b="1" dirty="0">
+                <a:solidFill>
+                  <a:schemeClr val="accent2"/>
+                </a:solidFill>
+                <a:latin typeface="+mn-lt"/>
+                <a:ea typeface="+mn-ea"/>
+                <a:cs typeface="+mn-cs"/>
+              </a:endParaRPr>
             </a:p>
           </p:txBody>
         </p:sp>
@@ -10436,7 +11380,7 @@
             <a:p>
               <a:pPr algn="l"/>
               <a:r>
-                <a:rPr lang="en" sz="1350" dirty="0">
+                <a:rPr lang="en-GB" sz="1350" dirty="0">
                   <a:solidFill>
                     <a:schemeClr val="accent5"/>
                   </a:solidFill>
@@ -10446,6 +11390,14 @@
                 </a:rPr>
                 <a:t>generations</a:t>
               </a:r>
+              <a:endParaRPr lang="en-GB" sz="1350" dirty="0">
+                <a:solidFill>
+                  <a:schemeClr val="accent5"/>
+                </a:solidFill>
+                <a:latin typeface="+mn-lt"/>
+                <a:ea typeface="+mn-ea"/>
+                <a:cs typeface="+mn-cs"/>
+              </a:endParaRPr>
             </a:p>
           </p:txBody>
         </p:sp>
@@ -10526,7 +11478,7 @@
               <a:p>
                 <a:pPr algn="l"/>
                 <a:r>
-                  <a:rPr lang="en" sz="1350" dirty="0">
+                  <a:rPr lang="en-GB" sz="1350" dirty="0">
                     <a:solidFill>
                       <a:schemeClr val="dk1"/>
                     </a:solidFill>
@@ -10536,6 +11488,14 @@
                   </a:rPr>
                   <a:t>EPG-NSGA-II</a:t>
                 </a:r>
+                <a:endParaRPr lang="en-GB" sz="1350" dirty="0">
+                  <a:solidFill>
+                    <a:schemeClr val="dk1"/>
+                  </a:solidFill>
+                  <a:latin typeface="+mn-lt"/>
+                  <a:ea typeface="+mn-ea"/>
+                  <a:cs typeface="+mn-cs"/>
+                </a:endParaRPr>
               </a:p>
             </p:txBody>
           </p:sp>
@@ -10602,7 +11562,7 @@
               <a:p>
                 <a:pPr algn="l"/>
                 <a:r>
-                  <a:rPr lang="en" sz="1350" dirty="0">
+                  <a:rPr lang="en-GB" sz="1350" dirty="0">
                     <a:solidFill>
                       <a:schemeClr val="dk1"/>
                     </a:solidFill>
@@ -10612,6 +11572,14 @@
                   </a:rPr>
                   <a:t>NSGA-II</a:t>
                 </a:r>
+                <a:endParaRPr lang="en-GB" sz="1350" dirty="0">
+                  <a:solidFill>
+                    <a:schemeClr val="dk1"/>
+                  </a:solidFill>
+                  <a:latin typeface="+mn-lt"/>
+                  <a:ea typeface="+mn-ea"/>
+                  <a:cs typeface="+mn-cs"/>
+                </a:endParaRPr>
               </a:p>
             </p:txBody>
           </p:sp>
@@ -10643,7 +11611,7 @@
             <a:p>
               <a:pPr algn="l"/>
               <a:r>
-                <a:rPr lang="en" sz="1350" dirty="0">
+                <a:rPr lang="en-GB" sz="1350" dirty="0">
                   <a:solidFill>
                     <a:schemeClr val="accent5"/>
                   </a:solidFill>
@@ -10653,6 +11621,14 @@
                 </a:rPr>
                 <a:t>Mean ± 1 SD · n = 3 runs</a:t>
               </a:r>
+              <a:endParaRPr lang="en-GB" sz="1350" dirty="0">
+                <a:solidFill>
+                  <a:schemeClr val="accent5"/>
+                </a:solidFill>
+                <a:latin typeface="+mn-lt"/>
+                <a:ea typeface="+mn-ea"/>
+                <a:cs typeface="+mn-cs"/>
+              </a:endParaRPr>
             </a:p>
           </p:txBody>
         </p:sp>
@@ -11465,7 +12441,7 @@
               <a:p>
                 <a:pPr algn="l"/>
                 <a:r>
-                  <a:rPr lang="en" sz="1350" dirty="0">
+                  <a:rPr lang="en-GB" sz="1350" dirty="0">
                     <a:solidFill>
                       <a:schemeClr val="dk1"/>
                     </a:solidFill>
@@ -11475,6 +12451,14 @@
                   </a:rPr>
                   <a:t>NSGA-II</a:t>
                 </a:r>
+                <a:endParaRPr lang="en-GB" sz="1350" dirty="0">
+                  <a:solidFill>
+                    <a:schemeClr val="dk1"/>
+                  </a:solidFill>
+                  <a:latin typeface="+mn-lt"/>
+                  <a:ea typeface="+mn-ea"/>
+                  <a:cs typeface="+mn-cs"/>
+                </a:endParaRPr>
               </a:p>
             </p:txBody>
           </p:sp>
@@ -11505,7 +12489,7 @@
               <a:p>
                 <a:pPr algn="l"/>
                 <a:r>
-                  <a:rPr lang="en" sz="1350" dirty="0">
+                  <a:rPr lang="en-GB" sz="1350" dirty="0">
                     <a:solidFill>
                       <a:schemeClr val="dk1"/>
                     </a:solidFill>
@@ -11515,6 +12499,14 @@
                   </a:rPr>
                   <a:t>NSGA-III</a:t>
                 </a:r>
+                <a:endParaRPr lang="en-GB" sz="1350" dirty="0">
+                  <a:solidFill>
+                    <a:schemeClr val="dk1"/>
+                  </a:solidFill>
+                  <a:latin typeface="+mn-lt"/>
+                  <a:ea typeface="+mn-ea"/>
+                  <a:cs typeface="+mn-cs"/>
+                </a:endParaRPr>
               </a:p>
             </p:txBody>
           </p:sp>
@@ -11545,7 +12537,7 @@
               <a:p>
                 <a:pPr algn="l"/>
                 <a:r>
-                  <a:rPr lang="en" sz="1350" dirty="0">
+                  <a:rPr lang="en-GB" sz="1350" dirty="0">
                     <a:solidFill>
                       <a:schemeClr val="dk1"/>
                     </a:solidFill>
@@ -11555,6 +12547,14 @@
                   </a:rPr>
                   <a:t>Seeding-only</a:t>
                 </a:r>
+                <a:endParaRPr lang="en-GB" sz="1350" dirty="0">
+                  <a:solidFill>
+                    <a:schemeClr val="dk1"/>
+                  </a:solidFill>
+                  <a:latin typeface="+mn-lt"/>
+                  <a:ea typeface="+mn-ea"/>
+                  <a:cs typeface="+mn-cs"/>
+                </a:endParaRPr>
               </a:p>
             </p:txBody>
           </p:sp>
@@ -11585,7 +12585,7 @@
               <a:p>
                 <a:pPr algn="l"/>
                 <a:r>
-                  <a:rPr lang="en" sz="1350" dirty="0">
+                  <a:rPr lang="en-GB" sz="1350" dirty="0">
                     <a:solidFill>
                       <a:schemeClr val="dk1"/>
                     </a:solidFill>
@@ -11595,6 +12595,14 @@
                   </a:rPr>
                   <a:t>Repair-only</a:t>
                 </a:r>
+                <a:endParaRPr lang="en-GB" sz="1350" dirty="0">
+                  <a:solidFill>
+                    <a:schemeClr val="dk1"/>
+                  </a:solidFill>
+                  <a:latin typeface="+mn-lt"/>
+                  <a:ea typeface="+mn-ea"/>
+                  <a:cs typeface="+mn-cs"/>
+                </a:endParaRPr>
               </a:p>
             </p:txBody>
           </p:sp>
@@ -11625,7 +12633,7 @@
               <a:p>
                 <a:pPr algn="l"/>
                 <a:r>
-                  <a:rPr lang="en" sz="1350" b="1" dirty="0">
+                  <a:rPr lang="en-GB" sz="1350" b="1" dirty="0">
                     <a:solidFill>
                       <a:schemeClr val="accent2"/>
                     </a:solidFill>
@@ -11635,6 +12643,14 @@
                   </a:rPr>
                   <a:t>EPG-NSGA-II</a:t>
                 </a:r>
+                <a:endParaRPr lang="en-GB" sz="1350" b="1" dirty="0">
+                  <a:solidFill>
+                    <a:schemeClr val="accent2"/>
+                  </a:solidFill>
+                  <a:latin typeface="+mn-lt"/>
+                  <a:ea typeface="+mn-ea"/>
+                  <a:cs typeface="+mn-cs"/>
+                </a:endParaRPr>
               </a:p>
             </p:txBody>
           </p:sp>
@@ -11680,7 +12696,7 @@
               <a:p>
                 <a:pPr algn="r"/>
                 <a:r>
-                  <a:rPr lang="en" sz="1350" dirty="0">
+                  <a:rPr lang="en-GB" sz="1350" dirty="0">
                     <a:solidFill>
                       <a:schemeClr val="accent5"/>
                     </a:solidFill>
@@ -11690,6 +12706,14 @@
                   </a:rPr>
                   <a:t>1.000</a:t>
                 </a:r>
+                <a:endParaRPr lang="en-GB" sz="1350" dirty="0">
+                  <a:solidFill>
+                    <a:schemeClr val="accent5"/>
+                  </a:solidFill>
+                  <a:latin typeface="+mn-lt"/>
+                  <a:ea typeface="+mn-ea"/>
+                  <a:cs typeface="+mn-cs"/>
+                </a:endParaRPr>
               </a:p>
             </p:txBody>
           </p:sp>
@@ -11720,7 +12744,7 @@
               <a:p>
                 <a:pPr algn="r"/>
                 <a:r>
-                  <a:rPr lang="en" sz="1350" dirty="0">
+                  <a:rPr lang="en-GB" sz="1350" dirty="0">
                     <a:solidFill>
                       <a:schemeClr val="accent5"/>
                     </a:solidFill>
@@ -11730,6 +12754,14 @@
                   </a:rPr>
                   <a:t>0.985</a:t>
                 </a:r>
+                <a:endParaRPr lang="en-GB" sz="1350" dirty="0">
+                  <a:solidFill>
+                    <a:schemeClr val="accent5"/>
+                  </a:solidFill>
+                  <a:latin typeface="+mn-lt"/>
+                  <a:ea typeface="+mn-ea"/>
+                  <a:cs typeface="+mn-cs"/>
+                </a:endParaRPr>
               </a:p>
             </p:txBody>
           </p:sp>
@@ -11760,7 +12792,7 @@
               <a:p>
                 <a:pPr algn="r"/>
                 <a:r>
-                  <a:rPr lang="en" sz="1350" dirty="0">
+                  <a:rPr lang="en-GB" sz="1350" dirty="0">
                     <a:solidFill>
                       <a:schemeClr val="accent5"/>
                     </a:solidFill>
@@ -11770,6 +12802,14 @@
                   </a:rPr>
                   <a:t>0.998</a:t>
                 </a:r>
+                <a:endParaRPr lang="en-GB" sz="1350" dirty="0">
+                  <a:solidFill>
+                    <a:schemeClr val="accent5"/>
+                  </a:solidFill>
+                  <a:latin typeface="+mn-lt"/>
+                  <a:ea typeface="+mn-ea"/>
+                  <a:cs typeface="+mn-cs"/>
+                </a:endParaRPr>
               </a:p>
             </p:txBody>
           </p:sp>
@@ -11800,7 +12840,7 @@
               <a:p>
                 <a:pPr algn="r"/>
                 <a:r>
-                  <a:rPr lang="en" sz="1350" dirty="0">
+                  <a:rPr lang="en-GB" sz="1350" dirty="0">
                     <a:solidFill>
                       <a:schemeClr val="accent5"/>
                     </a:solidFill>
@@ -11810,6 +12850,14 @@
                   </a:rPr>
                   <a:t>1.048</a:t>
                 </a:r>
+                <a:endParaRPr lang="en-GB" sz="1350" dirty="0">
+                  <a:solidFill>
+                    <a:schemeClr val="accent5"/>
+                  </a:solidFill>
+                  <a:latin typeface="+mn-lt"/>
+                  <a:ea typeface="+mn-ea"/>
+                  <a:cs typeface="+mn-cs"/>
+                </a:endParaRPr>
               </a:p>
             </p:txBody>
           </p:sp>
@@ -11840,7 +12888,7 @@
               <a:p>
                 <a:pPr algn="r"/>
                 <a:r>
-                  <a:rPr lang="en" sz="1350" b="1" dirty="0">
+                  <a:rPr lang="en-GB" sz="1350" b="1" dirty="0">
                     <a:solidFill>
                       <a:schemeClr val="accent2"/>
                     </a:solidFill>
@@ -11850,6 +12898,14 @@
                   </a:rPr>
                   <a:t>1.048</a:t>
                 </a:r>
+                <a:endParaRPr lang="en-GB" sz="1350" b="1" dirty="0">
+                  <a:solidFill>
+                    <a:schemeClr val="accent2"/>
+                  </a:solidFill>
+                  <a:latin typeface="+mn-lt"/>
+                  <a:ea typeface="+mn-ea"/>
+                  <a:cs typeface="+mn-cs"/>
+                </a:endParaRPr>
               </a:p>
             </p:txBody>
           </p:sp>
@@ -11895,7 +12951,7 @@
               <a:p>
                 <a:pPr algn="ctr"/>
                 <a:r>
-                  <a:rPr lang="en" sz="1350" dirty="0">
+                  <a:rPr lang="en-GB" sz="1350" dirty="0">
                     <a:solidFill>
                       <a:schemeClr val="accent5"/>
                     </a:solidFill>
@@ -11905,6 +12961,14 @@
                   </a:rPr>
                   <a:t>0.96</a:t>
                 </a:r>
+                <a:endParaRPr lang="en-GB" sz="1350" dirty="0">
+                  <a:solidFill>
+                    <a:schemeClr val="accent5"/>
+                  </a:solidFill>
+                  <a:latin typeface="+mn-lt"/>
+                  <a:ea typeface="+mn-ea"/>
+                  <a:cs typeface="+mn-cs"/>
+                </a:endParaRPr>
               </a:p>
             </p:txBody>
           </p:sp>
@@ -11935,7 +12999,7 @@
               <a:p>
                 <a:pPr algn="ctr"/>
                 <a:r>
-                  <a:rPr lang="en" sz="1350" dirty="0">
+                  <a:rPr lang="en-GB" sz="1350" dirty="0">
                     <a:solidFill>
                       <a:schemeClr val="accent5"/>
                     </a:solidFill>
@@ -11945,6 +13009,14 @@
                   </a:rPr>
                   <a:t>1.00</a:t>
                 </a:r>
+                <a:endParaRPr lang="en-GB" sz="1350" dirty="0">
+                  <a:solidFill>
+                    <a:schemeClr val="accent5"/>
+                  </a:solidFill>
+                  <a:latin typeface="+mn-lt"/>
+                  <a:ea typeface="+mn-ea"/>
+                  <a:cs typeface="+mn-cs"/>
+                </a:endParaRPr>
               </a:p>
             </p:txBody>
           </p:sp>
@@ -11975,7 +13047,7 @@
               <a:p>
                 <a:pPr algn="ctr"/>
                 <a:r>
-                  <a:rPr lang="en" sz="1350" dirty="0">
+                  <a:rPr lang="en-GB" sz="1350" dirty="0">
                     <a:solidFill>
                       <a:schemeClr val="accent5"/>
                     </a:solidFill>
@@ -11985,6 +13057,14 @@
                   </a:rPr>
                   <a:t>1.04</a:t>
                 </a:r>
+                <a:endParaRPr lang="en-GB" sz="1350" dirty="0">
+                  <a:solidFill>
+                    <a:schemeClr val="accent5"/>
+                  </a:solidFill>
+                  <a:latin typeface="+mn-lt"/>
+                  <a:ea typeface="+mn-ea"/>
+                  <a:cs typeface="+mn-cs"/>
+                </a:endParaRPr>
               </a:p>
             </p:txBody>
           </p:sp>
@@ -12015,7 +13095,7 @@
               <a:p>
                 <a:pPr algn="ctr"/>
                 <a:r>
-                  <a:rPr lang="en" sz="1350" dirty="0">
+                  <a:rPr lang="en-GB" sz="1350" dirty="0">
                     <a:solidFill>
                       <a:schemeClr val="accent5"/>
                     </a:solidFill>
@@ -12025,6 +13105,14 @@
                   </a:rPr>
                   <a:t>1.07</a:t>
                 </a:r>
+                <a:endParaRPr lang="en-GB" sz="1350" dirty="0">
+                  <a:solidFill>
+                    <a:schemeClr val="accent5"/>
+                  </a:solidFill>
+                  <a:latin typeface="+mn-lt"/>
+                  <a:ea typeface="+mn-ea"/>
+                  <a:cs typeface="+mn-cs"/>
+                </a:endParaRPr>
               </a:p>
             </p:txBody>
           </p:sp>
@@ -12056,7 +13144,7 @@
             <a:p>
               <a:pPr algn="ctr"/>
               <a:r>
-                <a:rPr lang="en" sz="1350" dirty="0">
+                <a:rPr lang="en-GB" sz="1350" dirty="0">
                   <a:solidFill>
                     <a:schemeClr val="accent5"/>
                   </a:solidFill>
@@ -12066,6 +13154,14 @@
                 </a:rPr>
                 <a:t>Final normalized HV</a:t>
               </a:r>
+              <a:endParaRPr lang="en-GB" sz="1350" dirty="0">
+                <a:solidFill>
+                  <a:schemeClr val="accent5"/>
+                </a:solidFill>
+                <a:latin typeface="+mn-lt"/>
+                <a:ea typeface="+mn-ea"/>
+                <a:cs typeface="+mn-cs"/>
+              </a:endParaRPr>
             </a:p>
           </p:txBody>
         </p:sp>
@@ -12096,7 +13192,7 @@
             <a:p>
               <a:pPr algn="l"/>
               <a:r>
-                <a:rPr lang="en" sz="1350" dirty="0">
+                <a:rPr lang="en-GB" sz="1350" dirty="0">
                   <a:solidFill>
                     <a:schemeClr val="accent5"/>
                   </a:solidFill>
@@ -12106,6 +13202,14 @@
                 </a:rPr>
                 <a:t>○ run · | mean</a:t>
               </a:r>
+              <a:endParaRPr lang="en-GB" sz="1350" dirty="0">
+                <a:solidFill>
+                  <a:schemeClr val="accent5"/>
+                </a:solidFill>
+                <a:latin typeface="+mn-lt"/>
+                <a:ea typeface="+mn-ea"/>
+                <a:cs typeface="+mn-cs"/>
+              </a:endParaRPr>
             </a:p>
           </p:txBody>
         </p:sp>
@@ -12151,7 +13255,7 @@
             <a:p>
               <a:pPr algn="l"/>
               <a:r>
-                <a:rPr lang="en" sz="1350" dirty="0">
+                <a:rPr lang="en-GB" sz="1350" dirty="0">
                   <a:solidFill>
                     <a:schemeClr val="accent5"/>
                   </a:solidFill>
@@ -12161,6 +13265,14 @@
                 </a:rPr>
                 <a:t>Population 100 · Three independent runs · HV normalized to NSGA-II final mean · Common reference point</a:t>
               </a:r>
+              <a:endParaRPr lang="en-GB" sz="1350" dirty="0">
+                <a:solidFill>
+                  <a:schemeClr val="accent5"/>
+                </a:solidFill>
+                <a:latin typeface="+mn-lt"/>
+                <a:ea typeface="+mn-ea"/>
+                <a:cs typeface="+mn-cs"/>
+              </a:endParaRPr>
             </a:p>
           </p:txBody>
         </p:sp>
@@ -12206,7 +13318,7 @@
             <a:p>
               <a:pPr algn="l"/>
               <a:r>
-                <a:rPr lang="en" sz="1050" dirty="0">
+                <a:rPr lang="en-GB" sz="1050" dirty="0">
                   <a:solidFill>
                     <a:schemeClr val="accent5"/>
                   </a:solidFill>
@@ -12216,6 +13328,14 @@
                 </a:rPr>
                 <a:t>Table I / Section III. Public-data model; storage energy/SOC limits and real-grid calibration remain future work.</a:t>
               </a:r>
+              <a:endParaRPr lang="en-GB" sz="1050" dirty="0">
+                <a:solidFill>
+                  <a:schemeClr val="accent5"/>
+                </a:solidFill>
+                <a:latin typeface="+mn-lt"/>
+                <a:ea typeface="+mn-ea"/>
+                <a:cs typeface="+mn-cs"/>
+              </a:endParaRPr>
             </a:p>
           </p:txBody>
         </p:sp>
@@ -12246,7 +13366,7 @@
             <a:p>
               <a:pPr algn="r"/>
               <a:r>
-                <a:rPr lang="en" sz="1050" dirty="0">
+                <a:rPr lang="en-GB" sz="1050" dirty="0">
                   <a:solidFill>
                     <a:schemeClr val="accent5"/>
                   </a:solidFill>
@@ -12256,6 +13376,14 @@
                 </a:rPr>
                 <a:t>04 / 05</a:t>
               </a:r>
+              <a:endParaRPr lang="en-GB" sz="1050" dirty="0">
+                <a:solidFill>
+                  <a:schemeClr val="accent5"/>
+                </a:solidFill>
+                <a:latin typeface="+mn-lt"/>
+                <a:ea typeface="+mn-ea"/>
+                <a:cs typeface="+mn-cs"/>
+              </a:endParaRPr>
             </a:p>
           </p:txBody>
         </p:sp>
@@ -12265,9 +13393,18 @@
   <p:clrMapOvr>
     <a:masterClrMapping/>
   </p:clrMapOvr>
-  <p:transition xmlns:p14="http://schemas.microsoft.com/office/powerpoint/2010/main" p14:dur="400">
-    <p:fade/>
-  </p:transition>
+  <mc:AlternateContent xmlns:mc="http://schemas.openxmlformats.org/markup-compatibility/2006">
+    <mc:Choice xmlns:p14="http://schemas.microsoft.com/office/powerpoint/2010/main" Requires="p14">
+      <p:transition p14:dur="400">
+        <p:fade/>
+      </p:transition>
+    </mc:Choice>
+    <mc:Fallback>
+      <p:transition>
+        <p:fade/>
+      </p:transition>
+    </mc:Fallback>
+  </mc:AlternateContent>
 </p:sld>
 </file>
 
@@ -12337,7 +13474,7 @@
             <a:p>
               <a:pPr algn="l"/>
               <a:r>
-                <a:rPr lang="en" sz="1500" dirty="0">
+                <a:rPr lang="en-GB" sz="1500" dirty="0">
                   <a:solidFill>
                     <a:srgbClr val="F2F8FC"/>
                   </a:solidFill>
@@ -12347,6 +13484,14 @@
                 </a:rPr>
                 <a:t>MIND 2026</a:t>
               </a:r>
+              <a:endParaRPr lang="en-GB" sz="1500" dirty="0">
+                <a:solidFill>
+                  <a:srgbClr val="F2F8FC"/>
+                </a:solidFill>
+                <a:latin typeface="+mn-lt"/>
+                <a:ea typeface="+mn-ea"/>
+                <a:cs typeface="+mn-cs"/>
+              </a:endParaRPr>
             </a:p>
           </p:txBody>
         </p:sp>
@@ -12377,7 +13522,7 @@
             <a:p>
               <a:pPr algn="r"/>
               <a:r>
-                <a:rPr lang="en" sz="1500" dirty="0">
+                <a:rPr lang="en-GB" sz="1500" dirty="0">
                   <a:solidFill>
                     <a:srgbClr val="66D5D0"/>
                   </a:solidFill>
@@ -12387,6 +13532,14 @@
                 </a:rPr>
                 <a:t>EPG-NSGA-II</a:t>
               </a:r>
+              <a:endParaRPr lang="en-GB" sz="1500" dirty="0">
+                <a:solidFill>
+                  <a:srgbClr val="66D5D0"/>
+                </a:solidFill>
+                <a:latin typeface="+mn-lt"/>
+                <a:ea typeface="+mn-ea"/>
+                <a:cs typeface="+mn-cs"/>
+              </a:endParaRPr>
             </a:p>
           </p:txBody>
         </p:sp>
@@ -12470,7 +13623,7 @@
             <a:p>
               <a:pPr algn="l"/>
               <a:r>
-                <a:rPr lang="en" sz="5700" b="1" dirty="0">
+                <a:rPr lang="en-GB" sz="5700" b="1" dirty="0">
                   <a:solidFill>
                     <a:srgbClr val="F2F8FC"/>
                   </a:solidFill>
@@ -12480,6 +13633,14 @@
                 </a:rPr>
                 <a:t>Thank you</a:t>
               </a:r>
+              <a:endParaRPr lang="en-GB" sz="5700" b="1" dirty="0">
+                <a:solidFill>
+                  <a:srgbClr val="F2F8FC"/>
+                </a:solidFill>
+                <a:latin typeface="+mn-lt"/>
+                <a:ea typeface="+mn-ea"/>
+                <a:cs typeface="+mn-cs"/>
+              </a:endParaRPr>
             </a:p>
           </p:txBody>
         </p:sp>
@@ -12525,7 +13686,7 @@
             <a:p>
               <a:pPr algn="l"/>
               <a:r>
-                <a:rPr lang="en" sz="2400" dirty="0">
+                <a:rPr lang="en-GB" sz="2400" dirty="0">
                   <a:solidFill>
                     <a:srgbClr val="66D5D0"/>
                   </a:solidFill>
@@ -12535,6 +13696,14 @@
                 </a:rPr>
                 <a:t>Questions &amp; discussion</a:t>
               </a:r>
+              <a:endParaRPr lang="en-GB" sz="2400" dirty="0">
+                <a:solidFill>
+                  <a:srgbClr val="66D5D0"/>
+                </a:solidFill>
+                <a:latin typeface="+mn-lt"/>
+                <a:ea typeface="+mn-ea"/>
+                <a:cs typeface="+mn-cs"/>
+              </a:endParaRPr>
             </a:p>
           </p:txBody>
         </p:sp>
@@ -13252,7 +14421,7 @@
               <a:p>
                 <a:pPr algn="ctr"/>
                 <a:r>
-                  <a:rPr lang="en" sz="1350" dirty="0">
+                  <a:rPr lang="en-GB" sz="1350" dirty="0">
                     <a:solidFill>
                       <a:srgbClr val="F2F8FC"/>
                     </a:solidFill>
@@ -13263,7 +14432,7 @@
                   <a:t>R</a:t>
                 </a:r>
                 <a:r>
-                  <a:rPr lang="en" sz="1050" baseline="-25000" dirty="0">
+                  <a:rPr lang="en-GB" sz="1050" baseline="-25000" dirty="0">
                     <a:solidFill>
                       <a:srgbClr val="F2F8FC"/>
                     </a:solidFill>
@@ -13274,7 +14443,7 @@
                   <a:t>1</a:t>
                 </a:r>
                 <a:r>
-                  <a:rPr lang="en" sz="1350" dirty="0">
+                  <a:rPr lang="en-GB" sz="1350" dirty="0">
                     <a:solidFill>
                       <a:srgbClr val="F2F8FC"/>
                     </a:solidFill>
@@ -13285,7 +14454,7 @@
                   <a:t>,P</a:t>
                 </a:r>
                 <a:r>
-                  <a:rPr lang="en" sz="1050" baseline="-25000" dirty="0">
+                  <a:rPr lang="en-GB" sz="1050" baseline="-25000" dirty="0">
                     <a:solidFill>
                       <a:srgbClr val="F2F8FC"/>
                     </a:solidFill>
@@ -13295,6 +14464,14 @@
                   </a:rPr>
                   <a:t>1</a:t>
                 </a:r>
+                <a:endParaRPr lang="en-GB" sz="1050" baseline="-25000" dirty="0">
+                  <a:solidFill>
+                    <a:srgbClr val="F2F8FC"/>
+                  </a:solidFill>
+                  <a:latin typeface="+mn-lt"/>
+                  <a:ea typeface="+mn-ea"/>
+                  <a:cs typeface="+mn-cs"/>
+                </a:endParaRPr>
               </a:p>
             </p:txBody>
           </p:sp>
@@ -13325,7 +14502,7 @@
               <a:p>
                 <a:pPr algn="ctr"/>
                 <a:r>
-                  <a:rPr lang="en" sz="1350" dirty="0">
+                  <a:rPr lang="en-GB" sz="1350" dirty="0">
                     <a:solidFill>
                       <a:srgbClr val="F2F8FC"/>
                     </a:solidFill>
@@ -13336,7 +14513,7 @@
                   <a:t>R</a:t>
                 </a:r>
                 <a:r>
-                  <a:rPr lang="en" sz="1050" baseline="-25000" dirty="0">
+                  <a:rPr lang="en-GB" sz="1050" baseline="-25000" dirty="0">
                     <a:solidFill>
                       <a:srgbClr val="F2F8FC"/>
                     </a:solidFill>
@@ -13347,7 +14524,7 @@
                   <a:t>2</a:t>
                 </a:r>
                 <a:r>
-                  <a:rPr lang="en" sz="1350" dirty="0">
+                  <a:rPr lang="en-GB" sz="1350" dirty="0">
                     <a:solidFill>
                       <a:srgbClr val="F2F8FC"/>
                     </a:solidFill>
@@ -13358,7 +14535,7 @@
                   <a:t>,P</a:t>
                 </a:r>
                 <a:r>
-                  <a:rPr lang="en" sz="1050" baseline="-25000" dirty="0">
+                  <a:rPr lang="en-GB" sz="1050" baseline="-25000" dirty="0">
                     <a:solidFill>
                       <a:srgbClr val="F2F8FC"/>
                     </a:solidFill>
@@ -13368,6 +14545,14 @@
                   </a:rPr>
                   <a:t>2</a:t>
                 </a:r>
+                <a:endParaRPr lang="en-GB" sz="1050" baseline="-25000" dirty="0">
+                  <a:solidFill>
+                    <a:srgbClr val="F2F8FC"/>
+                  </a:solidFill>
+                  <a:latin typeface="+mn-lt"/>
+                  <a:ea typeface="+mn-ea"/>
+                  <a:cs typeface="+mn-cs"/>
+                </a:endParaRPr>
               </a:p>
             </p:txBody>
           </p:sp>
@@ -13398,7 +14583,7 @@
               <a:p>
                 <a:pPr algn="ctr"/>
                 <a:r>
-                  <a:rPr lang="en" sz="1350" dirty="0">
+                  <a:rPr lang="en-GB" sz="1350" dirty="0">
                     <a:solidFill>
                       <a:srgbClr val="F2F8FC"/>
                     </a:solidFill>
@@ -13409,7 +14594,7 @@
                   <a:t>R</a:t>
                 </a:r>
                 <a:r>
-                  <a:rPr lang="en" sz="1050" baseline="-25000" dirty="0">
+                  <a:rPr lang="en-GB" sz="1050" baseline="-25000" dirty="0">
                     <a:solidFill>
                       <a:srgbClr val="F2F8FC"/>
                     </a:solidFill>
@@ -13420,7 +14605,7 @@
                   <a:t>j</a:t>
                 </a:r>
                 <a:r>
-                  <a:rPr lang="en" sz="1350" dirty="0">
+                  <a:rPr lang="en-GB" sz="1350" dirty="0">
                     <a:solidFill>
                       <a:srgbClr val="F2F8FC"/>
                     </a:solidFill>
@@ -13431,7 +14616,7 @@
                   <a:t>,P</a:t>
                 </a:r>
                 <a:r>
-                  <a:rPr lang="en" sz="1050" baseline="-25000" dirty="0">
+                  <a:rPr lang="en-GB" sz="1050" baseline="-25000" dirty="0">
                     <a:solidFill>
                       <a:srgbClr val="F2F8FC"/>
                     </a:solidFill>
@@ -13441,6 +14626,14 @@
                   </a:rPr>
                   <a:t>j</a:t>
                 </a:r>
+                <a:endParaRPr lang="en-GB" sz="1050" baseline="-25000" dirty="0">
+                  <a:solidFill>
+                    <a:srgbClr val="F2F8FC"/>
+                  </a:solidFill>
+                  <a:latin typeface="+mn-lt"/>
+                  <a:ea typeface="+mn-ea"/>
+                  <a:cs typeface="+mn-cs"/>
+                </a:endParaRPr>
               </a:p>
             </p:txBody>
           </p:sp>
@@ -13529,7 +14722,7 @@
                 </a:lnSpc>
               </a:pPr>
               <a:r>
-                <a:rPr lang="en" sz="2400" dirty="0">
+                <a:rPr lang="en-GB" sz="2400" dirty="0">
                   <a:solidFill>
                     <a:srgbClr val="F2F8FC"/>
                   </a:solidFill>
@@ -13537,10 +14730,10 @@
                   <a:ea typeface="+mn-ea"/>
                   <a:cs typeface="+mn-cs"/>
                 </a:rPr>
-                <a:t xml:space="preserve">Engineering priors support </a:t>
+                <a:t>Engineering priors support </a:t>
               </a:r>
               <a:r>
-                <a:rPr lang="en" sz="2400" b="1" dirty="0">
+                <a:rPr lang="en-GB" sz="2400" b="1" dirty="0">
                   <a:solidFill>
                     <a:srgbClr val="66D5D0"/>
                   </a:solidFill>
@@ -13551,7 +14744,7 @@
                 <a:t>more effective search</a:t>
               </a:r>
               <a:br>
-                <a:rPr lang="en" sz="2400" b="1" dirty="0">
+                <a:rPr lang="en-GB" sz="2400" b="1" dirty="0">
                   <a:solidFill>
                     <a:srgbClr val="66D5D0"/>
                   </a:solidFill>
@@ -13561,7 +14754,7 @@
                 </a:rPr>
               </a:br>
               <a:r>
-                <a:rPr lang="en" sz="2400" dirty="0">
+                <a:rPr lang="en-GB" sz="2400" dirty="0">
                   <a:solidFill>
                     <a:srgbClr val="F2F8FC"/>
                   </a:solidFill>
@@ -13571,6 +14764,14 @@
                 </a:rPr>
                 <a:t>and differentiated CLR and storage planning.</a:t>
               </a:r>
+              <a:endParaRPr lang="en-GB" sz="2400" dirty="0">
+                <a:solidFill>
+                  <a:srgbClr val="F2F8FC"/>
+                </a:solidFill>
+                <a:latin typeface="+mn-lt"/>
+                <a:ea typeface="+mn-ea"/>
+                <a:cs typeface="+mn-cs"/>
+              </a:endParaRPr>
             </a:p>
           </p:txBody>
         </p:sp>
@@ -13601,7 +14802,7 @@
             <a:p>
               <a:pPr algn="l"/>
               <a:r>
-                <a:rPr lang="en" sz="1350" dirty="0">
+                <a:rPr lang="en-GB" sz="1350" dirty="0">
                   <a:solidFill>
                     <a:srgbClr val="66D5D0"/>
                   </a:solidFill>
@@ -13611,6 +14812,14 @@
                 </a:rPr>
                 <a:t>ENGINEERING KNOWLEDGE → CANDIDATE CONSTRUCTION → PLANNING TRADE-OFFS</a:t>
               </a:r>
+              <a:endParaRPr lang="en-GB" sz="1350" dirty="0">
+                <a:solidFill>
+                  <a:srgbClr val="66D5D0"/>
+                </a:solidFill>
+                <a:latin typeface="+mn-lt"/>
+                <a:ea typeface="+mn-ea"/>
+                <a:cs typeface="+mn-cs"/>
+              </a:endParaRPr>
             </a:p>
           </p:txBody>
         </p:sp>
@@ -13656,7 +14865,7 @@
             <a:p>
               <a:pPr algn="l"/>
               <a:r>
-                <a:rPr lang="en" sz="1050" dirty="0">
+                <a:rPr lang="en-GB" sz="1050" dirty="0">
                   <a:solidFill>
                     <a:srgbClr val="F2F8FC"/>
                   </a:solidFill>
@@ -13666,6 +14875,14 @@
                 </a:rPr>
                 <a:t>Engineering-Prior-Guided NSGA-II · County-level 110 kV planning</a:t>
               </a:r>
+              <a:endParaRPr lang="en-GB" sz="1050" dirty="0">
+                <a:solidFill>
+                  <a:srgbClr val="F2F8FC"/>
+                </a:solidFill>
+                <a:latin typeface="+mn-lt"/>
+                <a:ea typeface="+mn-ea"/>
+                <a:cs typeface="+mn-cs"/>
+              </a:endParaRPr>
             </a:p>
           </p:txBody>
         </p:sp>
@@ -13696,7 +14913,7 @@
             <a:p>
               <a:pPr algn="r"/>
               <a:r>
-                <a:rPr lang="en" sz="1050" dirty="0">
+                <a:rPr lang="en-GB" sz="1050" dirty="0">
                   <a:solidFill>
                     <a:srgbClr val="F2F8FC"/>
                   </a:solidFill>
@@ -13706,6 +14923,14 @@
                 </a:rPr>
                 <a:t>05 / 05</a:t>
               </a:r>
+              <a:endParaRPr lang="en-GB" sz="1050" dirty="0">
+                <a:solidFill>
+                  <a:srgbClr val="F2F8FC"/>
+                </a:solidFill>
+                <a:latin typeface="+mn-lt"/>
+                <a:ea typeface="+mn-ea"/>
+                <a:cs typeface="+mn-cs"/>
+              </a:endParaRPr>
             </a:p>
           </p:txBody>
         </p:sp>
@@ -13715,9 +14940,18 @@
   <p:clrMapOvr>
     <a:masterClrMapping/>
   </p:clrMapOvr>
-  <p:transition xmlns:p14="http://schemas.microsoft.com/office/powerpoint/2010/main" p14:dur="400">
-    <p:fade/>
-  </p:transition>
+  <mc:AlternateContent xmlns:mc="http://schemas.openxmlformats.org/markup-compatibility/2006">
+    <mc:Choice xmlns:p14="http://schemas.microsoft.com/office/powerpoint/2010/main" Requires="p14">
+      <p:transition p14:dur="400">
+        <p:fade/>
+      </p:transition>
+    </mc:Choice>
+    <mc:Fallback>
+      <p:transition>
+        <p:fade/>
+      </p:transition>
+    </mc:Fallback>
+  </mc:AlternateContent>
 </p:sld>
 </file>
 
@@ -14037,7 +15271,11 @@
       </a:style>
     </a:lnDef>
   </a:objectDefaults>
-  <a:extraClrSchemeLst/>
+  <a:extLst>
+    <a:ext uri="{05A4C25C-085E-4340-85A3-A5531E510DB2}">
+      <thm15:themeFamily xmlns:thm15="http://schemas.microsoft.com/office/thememl/2012/main" name="Office Theme" id="{62F939B6-93AF-4DB8-9C6B-D6C7DFDC589F}" vid="{4A3C46E8-61CC-4603-A589-7422A47A8E4A}"/>
+    </a:ext>
+  </a:extLst>
 </a:theme>
 </file>
 
@@ -14357,6 +15595,10 @@
       </a:style>
     </a:lnDef>
   </a:objectDefaults>
-  <a:extraClrSchemeLst/>
+  <a:extLst>
+    <a:ext uri="{05A4C25C-085E-4340-85A3-A5531E510DB2}">
+      <thm15:themeFamily xmlns:thm15="http://schemas.microsoft.com/office/thememl/2012/main" name="Office Theme" id="{62F939B6-93AF-4DB8-9C6B-D6C7DFDC589F}" vid="{4A3C46E8-61CC-4603-A589-7422A47A8E4A}"/>
+    </a:ext>
+  </a:extLst>
 </a:theme>
 </file>